--- a/内水氾濫リスク把握・対応マニュアル整備事業_提案スライド.pptx
+++ b/内水氾濫リスク把握・対応マニュアル整備事業_提案スライド.pptx
@@ -15,9 +15,10 @@
     <p:sldId id="263" r:id="rId9"/>
     <p:sldId id="264" r:id="rId10"/>
     <p:sldId id="265" r:id="rId11"/>
+    <p:sldId id="266" r:id="rId12"/>
   </p:sldIdLst>
   <p:notesMasterIdLst>
-    <p:notesMasterId r:id="rId12"/>
+    <p:notesMasterId r:id="rId13"/>
   </p:notesMasterIdLst>
   <p:sldSz cx="12192000" cy="6858000"/>
   <p:notesSz cx="6858000" cy="12192000"/>
@@ -1311,6 +1312,94 @@
             <a:fld id="{F7021451-1387-4CA6-816F-3879F97B5CBC}" type="slidenum">
               <a:rPr lang="en-US"/>
               <a:t>10</a:t>
+            </a:fld>
+            <a:endParaRPr lang="en-US"/>
+          </a:p>
+        </p:txBody>
+      </p:sp>
+    </p:spTree>
+    <p:extLst>
+      <p:ext uri="{BB962C8B-B14F-4D97-AF65-F5344CB8AC3E}">
+        <p14:creationId xmlns:p14="http://schemas.microsoft.com/office/powerpoint/2010/main" val="1024086991"/>
+      </p:ext>
+    </p:extLst>
+  </p:cSld>
+  <p:clrMapOvr>
+    <a:masterClrMapping/>
+  </p:clrMapOvr>
+</p:notes>
+</file>
+
+<file path=ppt/notesSlides/notesSlide11.xml><?xml version="1.0" encoding="utf-8"?>
+<p:notes xmlns:a="http://schemas.openxmlformats.org/drawingml/2006/main" xmlns:r="http://schemas.openxmlformats.org/officeDocument/2006/relationships" xmlns:p="http://schemas.openxmlformats.org/presentationml/2006/main">
+  <p:cSld>
+    <p:spTree>
+      <p:nvGrpSpPr>
+        <p:cNvPr id="1" name=""/>
+        <p:cNvGrpSpPr/>
+        <p:nvPr/>
+      </p:nvGrpSpPr>
+      <p:grpSpPr>
+        <a:xfrm>
+          <a:off x="0" y="0"/>
+          <a:ext cx="0" cy="0"/>
+          <a:chOff x="0" y="0"/>
+          <a:chExt cx="0" cy="0"/>
+        </a:xfrm>
+      </p:grpSpPr>
+      <p:sp>
+        <p:nvSpPr>
+          <p:cNvPr id="2" name="Slide Image Placeholder 1"/>
+          <p:cNvSpPr>
+            <a:spLocks noGrp="1" noRot="1" noChangeAspect="1"/>
+          </p:cNvSpPr>
+          <p:nvPr>
+            <p:ph type="sldImg"/>
+          </p:nvPr>
+        </p:nvSpPr>
+        <p:spPr/>
+      </p:sp>
+      <p:sp>
+        <p:nvSpPr>
+          <p:cNvPr id="3" name="Notes Placeholder 2"/>
+          <p:cNvSpPr>
+            <a:spLocks noGrp="1"/>
+          </p:cNvSpPr>
+          <p:nvPr>
+            <p:ph type="body" idx="1"/>
+          </p:nvPr>
+        </p:nvSpPr>
+        <p:spPr/>
+        <p:txBody>
+          <a:bodyPr/>
+          <a:lstStyle/>
+          <a:p>
+            <a:r>
+              <a:rPr lang="en-US" dirty="0"/>
+              <a:t/>
+            </a:r>
+            <a:endParaRPr lang="en-US" dirty="0"/>
+          </a:p>
+        </p:txBody>
+      </p:sp>
+      <p:sp>
+        <p:nvSpPr>
+          <p:cNvPr id="4" name="Slide Number Placeholder 3"/>
+          <p:cNvSpPr>
+            <a:spLocks noGrp="1"/>
+          </p:cNvSpPr>
+          <p:nvPr>
+            <p:ph type="sldNum" sz="quarter" idx="10"/>
+          </p:nvPr>
+        </p:nvSpPr>
+        <p:spPr/>
+        <p:txBody>
+          <a:bodyPr/>
+          <a:lstStyle/>
+          <a:p>
+            <a:fld id="{F7021451-1387-4CA6-816F-3879F97B5CBC}" type="slidenum">
+              <a:rPr lang="en-US"/>
+              <a:t>11</a:t>
             </a:fld>
             <a:endParaRPr lang="en-US"/>
           </a:p>
@@ -2663,6 +2752,528 @@
     <p:bg>
       <p:bgPr>
         <a:solidFill>
+          <a:srgbClr val="FFFFFF"/>
+        </a:solidFill>
+      </p:bgPr>
+    </p:bg>
+    <p:spTree>
+      <p:nvGrpSpPr>
+        <p:cNvPr id="1" name=""/>
+        <p:cNvGrpSpPr/>
+        <p:nvPr/>
+      </p:nvGrpSpPr>
+      <p:grpSpPr>
+        <a:xfrm>
+          <a:off x="0" y="0"/>
+          <a:ext cx="0" cy="0"/>
+          <a:chOff x="0" y="0"/>
+          <a:chExt cx="0" cy="0"/>
+        </a:xfrm>
+      </p:grpSpPr>
+      <p:sp>
+        <p:nvSpPr>
+          <p:cNvPr id="2" name="Text 0"/>
+          <p:cNvSpPr txBox="1"/>
+          <p:nvPr/>
+        </p:nvSpPr>
+        <p:spPr>
+          <a:xfrm>
+            <a:off x="548640" y="320040"/>
+            <a:ext cx="9144000" cy="320040"/>
+          </a:xfrm>
+          <a:prstGeom prst="rect">
+            <a:avLst/>
+          </a:prstGeom>
+          <a:noFill/>
+          <a:ln/>
+        </p:spPr>
+        <p:txBody>
+          <a:bodyPr wrap="square" lIns="0" tIns="0" rIns="0" bIns="0" rtlCol="0" anchor="ctr"/>
+          <a:lstStyle/>
+          <a:p>
+            <a:pPr indent="0" marL="0">
+              <a:buNone/>
+            </a:pPr>
+            <a:r>
+              <a:rPr lang="en-US" sz="1300" b="1" dirty="0">
+                <a:solidFill>
+                  <a:srgbClr val="1C7293"/>
+                </a:solidFill>
+                <a:latin typeface="Calibri" pitchFamily="34" charset="0"/>
+                <a:ea typeface="Calibri" pitchFamily="34" charset="-122"/>
+                <a:cs typeface="Calibri" pitchFamily="34" charset="-120"/>
+              </a:rPr>
+              <a:t>8｜実施体制・費用／期待される効果</a:t>
+            </a:r>
+            <a:endParaRPr lang="en-US" sz="1300" dirty="0"/>
+          </a:p>
+        </p:txBody>
+      </p:sp>
+      <p:sp>
+        <p:nvSpPr>
+          <p:cNvPr id="3" name="Text 1"/>
+          <p:cNvSpPr txBox="1"/>
+          <p:nvPr/>
+        </p:nvSpPr>
+        <p:spPr>
+          <a:xfrm>
+            <a:off x="548640" y="594360"/>
+            <a:ext cx="10972800" cy="640080"/>
+          </a:xfrm>
+          <a:prstGeom prst="rect">
+            <a:avLst/>
+          </a:prstGeom>
+          <a:noFill/>
+          <a:ln/>
+        </p:spPr>
+        <p:txBody>
+          <a:bodyPr wrap="square" lIns="0" tIns="0" rIns="0" bIns="0" rtlCol="0" anchor="ctr"/>
+          <a:lstStyle/>
+          <a:p>
+            <a:pPr indent="0" marL="0">
+              <a:buNone/>
+            </a:pPr>
+            <a:r>
+              <a:rPr lang="en-US" sz="2800" b="1" dirty="0">
+                <a:solidFill>
+                  <a:srgbClr val="21295C"/>
+                </a:solidFill>
+                <a:latin typeface="Cambria" pitchFamily="34" charset="0"/>
+                <a:ea typeface="Cambria" pitchFamily="34" charset="-122"/>
+                <a:cs typeface="Cambria" pitchFamily="34" charset="-120"/>
+              </a:rPr>
+              <a:t>低コストで、組織的な対応力を底上げ</a:t>
+            </a:r>
+            <a:endParaRPr lang="en-US" sz="2800" dirty="0"/>
+          </a:p>
+        </p:txBody>
+      </p:sp>
+      <p:sp>
+        <p:nvSpPr>
+          <p:cNvPr id="4" name="Shape 2"/>
+          <p:cNvSpPr/>
+          <p:nvPr/>
+        </p:nvSpPr>
+        <p:spPr>
+          <a:xfrm>
+            <a:off x="548640" y="1600200"/>
+            <a:ext cx="5394960" cy="4114800"/>
+          </a:xfrm>
+          <a:prstGeom prst="roundRect">
+            <a:avLst>
+              <a:gd name="adj" fmla="val 2222"/>
+            </a:avLst>
+          </a:prstGeom>
+          <a:solidFill>
+            <a:srgbClr val="F4F8FA"/>
+          </a:solidFill>
+          <a:ln/>
+        </p:spPr>
+      </p:sp>
+      <p:sp>
+        <p:nvSpPr>
+          <p:cNvPr id="5" name="Text 3"/>
+          <p:cNvSpPr txBox="1"/>
+          <p:nvPr/>
+        </p:nvSpPr>
+        <p:spPr>
+          <a:xfrm>
+            <a:off x="822960" y="1828800"/>
+            <a:ext cx="4846320" cy="365760"/>
+          </a:xfrm>
+          <a:prstGeom prst="rect">
+            <a:avLst/>
+          </a:prstGeom>
+          <a:noFill/>
+          <a:ln/>
+        </p:spPr>
+        <p:txBody>
+          <a:bodyPr wrap="square" lIns="0" tIns="0" rIns="0" bIns="0" rtlCol="0" anchor="ctr"/>
+          <a:lstStyle/>
+          <a:p>
+            <a:pPr indent="0" marL="0">
+              <a:buNone/>
+            </a:pPr>
+            <a:r>
+              <a:rPr lang="en-US" sz="1600" b="1" dirty="0">
+                <a:solidFill>
+                  <a:srgbClr val="21295C"/>
+                </a:solidFill>
+                <a:latin typeface="Cambria" pitchFamily="34" charset="0"/>
+                <a:ea typeface="Cambria" pitchFamily="34" charset="-122"/>
+                <a:cs typeface="Cambria" pitchFamily="34" charset="-120"/>
+              </a:rPr>
+              <a:t>実施体制・費用</a:t>
+            </a:r>
+            <a:endParaRPr lang="en-US" sz="1600" dirty="0"/>
+          </a:p>
+        </p:txBody>
+      </p:sp>
+      <p:sp>
+        <p:nvSpPr>
+          <p:cNvPr id="6" name="Text 4"/>
+          <p:cNvSpPr txBox="1"/>
+          <p:nvPr/>
+        </p:nvSpPr>
+        <p:spPr>
+          <a:xfrm>
+            <a:off x="822960" y="2331720"/>
+            <a:ext cx="4846320" cy="3291840"/>
+          </a:xfrm>
+          <a:prstGeom prst="rect">
+            <a:avLst/>
+          </a:prstGeom>
+          <a:noFill/>
+          <a:ln/>
+        </p:spPr>
+        <p:txBody>
+          <a:bodyPr wrap="square" lIns="0" tIns="0" rIns="0" bIns="0" rtlCol="0" anchor="t"/>
+          <a:lstStyle/>
+          <a:p>
+            <a:pPr marL="228600" indent="-228600">
+              <a:spcAft>
+                <a:spcPts val="1200"/>
+              </a:spcAft>
+              <a:buSzPct val="100000"/>
+              <a:buChar char="▪"/>
+            </a:pPr>
+            <a:r>
+              <a:rPr lang="en-US" sz="1300" dirty="0">
+                <a:solidFill>
+                  <a:srgbClr val="1E2430"/>
+                </a:solidFill>
+                <a:latin typeface="Calibri" pitchFamily="34" charset="0"/>
+                <a:ea typeface="Calibri" pitchFamily="34" charset="-122"/>
+                <a:cs typeface="Calibri" pitchFamily="34" charset="-120"/>
+              </a:rPr>
+              <a:t>主管：地域活躍部 防災対策課</a:t>
+            </a:r>
+            <a:endParaRPr lang="en-US" sz="1300" dirty="0"/>
+          </a:p>
+          <a:p>
+            <a:pPr marL="228600" indent="-228600">
+              <a:spcAft>
+                <a:spcPts val="1200"/>
+              </a:spcAft>
+              <a:buSzPct val="100000"/>
+              <a:buChar char="▪"/>
+            </a:pPr>
+            <a:r>
+              <a:rPr lang="en-US" sz="1300" dirty="0">
+                <a:solidFill>
+                  <a:srgbClr val="1E2430"/>
+                </a:solidFill>
+                <a:latin typeface="Calibri" pitchFamily="34" charset="0"/>
+                <a:ea typeface="Calibri" pitchFamily="34" charset="-122"/>
+                <a:cs typeface="Calibri" pitchFamily="34" charset="-120"/>
+              </a:rPr>
+              <a:t>関係部署（道路管理担当課、上下水道局、福祉部門等）と連携し、内製で実施することを基本とする</a:t>
+            </a:r>
+            <a:endParaRPr lang="en-US" sz="1300" dirty="0"/>
+          </a:p>
+          <a:p>
+            <a:pPr marL="228600" indent="-228600">
+              <a:spcAft>
+                <a:spcPts val="1200"/>
+              </a:spcAft>
+              <a:buSzPct val="100000"/>
+              <a:buChar char="▪"/>
+            </a:pPr>
+            <a:r>
+              <a:rPr lang="en-US" sz="1300" dirty="0">
+                <a:solidFill>
+                  <a:srgbClr val="1E2430"/>
+                </a:solidFill>
+                <a:latin typeface="Calibri" pitchFamily="34" charset="0"/>
+                <a:ea typeface="Calibri" pitchFamily="34" charset="-122"/>
+                <a:cs typeface="Calibri" pitchFamily="34" charset="-120"/>
+              </a:rPr>
+              <a:t>外部委託が必要な範囲（専門的な浸水解析等）は最小限にとどめ、既存の統計データ・庁内知見を最大限活用</a:t>
+            </a:r>
+            <a:endParaRPr lang="en-US" sz="1300" dirty="0"/>
+          </a:p>
+          <a:p>
+            <a:pPr marL="228600" indent="-228600">
+              <a:spcAft>
+                <a:spcPts val="1200"/>
+              </a:spcAft>
+              <a:buSzPct val="100000"/>
+              <a:buChar char="▪"/>
+            </a:pPr>
+            <a:r>
+              <a:rPr lang="en-US" sz="1300" dirty="0">
+                <a:solidFill>
+                  <a:srgbClr val="1E2430"/>
+                </a:solidFill>
+                <a:latin typeface="Calibri" pitchFamily="34" charset="0"/>
+                <a:ea typeface="Calibri" pitchFamily="34" charset="-122"/>
+                <a:cs typeface="Calibri" pitchFamily="34" charset="-120"/>
+              </a:rPr>
+              <a:t>必要に応じて国の防災・安全交付金等の活用可能性を別途検討</a:t>
+            </a:r>
+            <a:endParaRPr lang="en-US" sz="1300" dirty="0"/>
+          </a:p>
+        </p:txBody>
+      </p:sp>
+      <p:sp>
+        <p:nvSpPr>
+          <p:cNvPr id="7" name="Shape 5"/>
+          <p:cNvSpPr/>
+          <p:nvPr/>
+        </p:nvSpPr>
+        <p:spPr>
+          <a:xfrm>
+            <a:off x="6263640" y="1600200"/>
+            <a:ext cx="5394960" cy="4114800"/>
+          </a:xfrm>
+          <a:prstGeom prst="roundRect">
+            <a:avLst>
+              <a:gd name="adj" fmla="val 2222"/>
+            </a:avLst>
+          </a:prstGeom>
+          <a:solidFill>
+            <a:srgbClr val="065A82"/>
+          </a:solidFill>
+          <a:ln/>
+        </p:spPr>
+      </p:sp>
+      <p:sp>
+        <p:nvSpPr>
+          <p:cNvPr id="8" name="Text 6"/>
+          <p:cNvSpPr txBox="1"/>
+          <p:nvPr/>
+        </p:nvSpPr>
+        <p:spPr>
+          <a:xfrm>
+            <a:off x="6537960" y="1828800"/>
+            <a:ext cx="4846320" cy="365760"/>
+          </a:xfrm>
+          <a:prstGeom prst="rect">
+            <a:avLst/>
+          </a:prstGeom>
+          <a:noFill/>
+          <a:ln/>
+        </p:spPr>
+        <p:txBody>
+          <a:bodyPr wrap="square" lIns="0" tIns="0" rIns="0" bIns="0" rtlCol="0" anchor="ctr"/>
+          <a:lstStyle/>
+          <a:p>
+            <a:pPr indent="0" marL="0">
+              <a:buNone/>
+            </a:pPr>
+            <a:r>
+              <a:rPr lang="en-US" sz="1600" b="1" dirty="0">
+                <a:solidFill>
+                  <a:srgbClr val="FFFFFF"/>
+                </a:solidFill>
+                <a:latin typeface="Cambria" pitchFamily="34" charset="0"/>
+                <a:ea typeface="Cambria" pitchFamily="34" charset="-122"/>
+                <a:cs typeface="Cambria" pitchFamily="34" charset="-120"/>
+              </a:rPr>
+              <a:t>期待される効果</a:t>
+            </a:r>
+            <a:endParaRPr lang="en-US" sz="1600" dirty="0"/>
+          </a:p>
+        </p:txBody>
+      </p:sp>
+      <p:sp>
+        <p:nvSpPr>
+          <p:cNvPr id="9" name="Text 7"/>
+          <p:cNvSpPr txBox="1"/>
+          <p:nvPr/>
+        </p:nvSpPr>
+        <p:spPr>
+          <a:xfrm>
+            <a:off x="6537960" y="2331720"/>
+            <a:ext cx="4846320" cy="3291840"/>
+          </a:xfrm>
+          <a:prstGeom prst="rect">
+            <a:avLst/>
+          </a:prstGeom>
+          <a:noFill/>
+          <a:ln/>
+        </p:spPr>
+        <p:txBody>
+          <a:bodyPr wrap="square" lIns="0" tIns="0" rIns="0" bIns="0" rtlCol="0" anchor="t"/>
+          <a:lstStyle/>
+          <a:p>
+            <a:pPr marL="228600" indent="-228600">
+              <a:spcAft>
+                <a:spcPts val="1200"/>
+              </a:spcAft>
+              <a:buSzPct val="100000"/>
+              <a:buChar char="▪"/>
+            </a:pPr>
+            <a:r>
+              <a:rPr lang="en-US" sz="1300" dirty="0">
+                <a:solidFill>
+                  <a:srgbClr val="CFE3ED"/>
+                </a:solidFill>
+                <a:latin typeface="Calibri" pitchFamily="34" charset="0"/>
+                <a:ea typeface="Calibri" pitchFamily="34" charset="-122"/>
+                <a:cs typeface="Calibri" pitchFamily="34" charset="-120"/>
+              </a:rPr>
+              <a:t>豪雨発生時における初動対応の迅速化・的確化</a:t>
+            </a:r>
+            <a:endParaRPr lang="en-US" sz="1300" dirty="0"/>
+          </a:p>
+          <a:p>
+            <a:pPr marL="228600" indent="-228600">
+              <a:spcAft>
+                <a:spcPts val="1200"/>
+              </a:spcAft>
+              <a:buSzPct val="100000"/>
+              <a:buChar char="▪"/>
+            </a:pPr>
+            <a:r>
+              <a:rPr lang="en-US" sz="1300" dirty="0">
+                <a:solidFill>
+                  <a:srgbClr val="CFE3ED"/>
+                </a:solidFill>
+                <a:latin typeface="Calibri" pitchFamily="34" charset="0"/>
+                <a:ea typeface="Calibri" pitchFamily="34" charset="-122"/>
+                <a:cs typeface="Calibri" pitchFamily="34" charset="-120"/>
+              </a:rPr>
+              <a:t>対応の属人化解消による組織的なリスク管理体制の構築</a:t>
+            </a:r>
+            <a:endParaRPr lang="en-US" sz="1300" dirty="0"/>
+          </a:p>
+          <a:p>
+            <a:pPr marL="228600" indent="-228600">
+              <a:spcAft>
+                <a:spcPts val="1200"/>
+              </a:spcAft>
+              <a:buSzPct val="100000"/>
+              <a:buChar char="▪"/>
+            </a:pPr>
+            <a:r>
+              <a:rPr lang="en-US" sz="1300" dirty="0">
+                <a:solidFill>
+                  <a:srgbClr val="CFE3ED"/>
+                </a:solidFill>
+                <a:latin typeface="Calibri" pitchFamily="34" charset="0"/>
+                <a:ea typeface="Calibri" pitchFamily="34" charset="-122"/>
+                <a:cs typeface="Calibri" pitchFamily="34" charset="-120"/>
+              </a:rPr>
+              <a:t>部署間の情報共有の円滑化による意思決定の迅速化</a:t>
+            </a:r>
+            <a:endParaRPr lang="en-US" sz="1300" dirty="0"/>
+          </a:p>
+          <a:p>
+            <a:pPr marL="228600" indent="-228600">
+              <a:spcAft>
+                <a:spcPts val="1200"/>
+              </a:spcAft>
+              <a:buSzPct val="100000"/>
+              <a:buChar char="▪"/>
+            </a:pPr>
+            <a:r>
+              <a:rPr lang="en-US" sz="1300" dirty="0">
+                <a:solidFill>
+                  <a:srgbClr val="CFE3ED"/>
+                </a:solidFill>
+                <a:latin typeface="Calibri" pitchFamily="34" charset="0"/>
+                <a:ea typeface="Calibri" pitchFamily="34" charset="-122"/>
+                <a:cs typeface="Calibri" pitchFamily="34" charset="-120"/>
+              </a:rPr>
+              <a:t>住民への情報提供・避難対応等の質の向上</a:t>
+            </a:r>
+            <a:endParaRPr lang="en-US" sz="1300" dirty="0"/>
+          </a:p>
+        </p:txBody>
+      </p:sp>
+      <p:sp>
+        <p:nvSpPr>
+          <p:cNvPr id="10" name="Text 8"/>
+          <p:cNvSpPr txBox="1"/>
+          <p:nvPr/>
+        </p:nvSpPr>
+        <p:spPr>
+          <a:xfrm>
+            <a:off x="457200" y="6473952"/>
+            <a:ext cx="7315200" cy="274320"/>
+          </a:xfrm>
+          <a:prstGeom prst="rect">
+            <a:avLst/>
+          </a:prstGeom>
+          <a:noFill/>
+          <a:ln/>
+        </p:spPr>
+        <p:txBody>
+          <a:bodyPr wrap="square" lIns="0" tIns="0" rIns="0" bIns="0" rtlCol="0" anchor="ctr"/>
+          <a:lstStyle/>
+          <a:p>
+            <a:pPr indent="0" marL="0">
+              <a:buNone/>
+            </a:pPr>
+            <a:r>
+              <a:rPr lang="en-US" sz="900" dirty="0">
+                <a:solidFill>
+                  <a:srgbClr val="5B6B76"/>
+                </a:solidFill>
+                <a:latin typeface="Calibri" pitchFamily="34" charset="0"/>
+                <a:ea typeface="Calibri" pitchFamily="34" charset="-122"/>
+                <a:cs typeface="Calibri" pitchFamily="34" charset="-120"/>
+              </a:rPr>
+              <a:t>豊田市役所　地域活躍部 防災対策課</a:t>
+            </a:r>
+            <a:endParaRPr lang="en-US" sz="900" dirty="0"/>
+          </a:p>
+        </p:txBody>
+      </p:sp>
+      <p:sp>
+        <p:nvSpPr>
+          <p:cNvPr id="11" name="Text 9"/>
+          <p:cNvSpPr txBox="1"/>
+          <p:nvPr/>
+        </p:nvSpPr>
+        <p:spPr>
+          <a:xfrm>
+            <a:off x="11274552" y="6473952"/>
+            <a:ext cx="457200" cy="274320"/>
+          </a:xfrm>
+          <a:prstGeom prst="rect">
+            <a:avLst/>
+          </a:prstGeom>
+          <a:noFill/>
+          <a:ln/>
+        </p:spPr>
+        <p:txBody>
+          <a:bodyPr wrap="square" lIns="0" tIns="0" rIns="0" bIns="0" rtlCol="0" anchor="ctr"/>
+          <a:lstStyle/>
+          <a:p>
+            <a:pPr algn="r" indent="0" marL="0">
+              <a:buNone/>
+            </a:pPr>
+            <a:r>
+              <a:rPr lang="en-US" sz="900" dirty="0">
+                <a:solidFill>
+                  <a:srgbClr val="5B6B76"/>
+                </a:solidFill>
+                <a:latin typeface="Calibri" pitchFamily="34" charset="0"/>
+                <a:ea typeface="Calibri" pitchFamily="34" charset="-122"/>
+                <a:cs typeface="Calibri" pitchFamily="34" charset="-120"/>
+              </a:rPr>
+              <a:t>10</a:t>
+            </a:r>
+            <a:endParaRPr lang="en-US" sz="900" dirty="0"/>
+          </a:p>
+        </p:txBody>
+      </p:sp>
+    </p:spTree>
+  </p:cSld>
+  <p:clrMapOvr>
+    <a:masterClrMapping/>
+  </p:clrMapOvr>
+</p:sld>
+</file>
+
+<file path=ppt/slides/slide11.xml><?xml version="1.0" encoding="utf-8"?>
+<p:sld xmlns:a="http://schemas.openxmlformats.org/drawingml/2006/main" xmlns:r="http://schemas.openxmlformats.org/officeDocument/2006/relationships" xmlns:p="http://schemas.openxmlformats.org/presentationml/2006/main">
+  <p:cSld name="Slide 11">
+    <p:bg>
+      <p:bgPr>
+        <a:solidFill>
           <a:srgbClr val="21295C"/>
         </a:solidFill>
       </p:bgPr>
@@ -2736,7 +3347,7 @@
                 <a:ea typeface="Calibri" pitchFamily="34" charset="-122"/>
                 <a:cs typeface="Calibri" pitchFamily="34" charset="-120"/>
               </a:rPr>
-              <a:t>8｜結び</a:t>
+              <a:t>9｜結び</a:t>
             </a:r>
             <a:endParaRPr lang="en-US" sz="1300" dirty="0"/>
           </a:p>
@@ -6123,7 +6734,7 @@
                 <a:ea typeface="Calibri" pitchFamily="34" charset="-122"/>
                 <a:cs typeface="Calibri" pitchFamily="34" charset="-120"/>
               </a:rPr>
-              <a:t>5｜提案内容</a:t>
+              <a:t>5｜他自治体における庁舎浸水の実例</a:t>
             </a:r>
             <a:endParaRPr lang="en-US" sz="1300" dirty="0"/>
           </a:p>
@@ -6162,7 +6773,7 @@
                 <a:ea typeface="Cambria" pitchFamily="34" charset="-122"/>
                 <a:cs typeface="Cambria" pitchFamily="34" charset="-120"/>
               </a:rPr>
-              <a:t>内水氾濫に特化した3本柱</a:t>
+              <a:t>「災害に強い庁舎」でも、浸水一つで機能停止した</a:t>
             </a:r>
             <a:endParaRPr lang="en-US" sz="2800" dirty="0"/>
           </a:p>
@@ -6176,12 +6787,12 @@
         </p:nvSpPr>
         <p:spPr>
           <a:xfrm>
-            <a:off x="548640" y="1600200"/>
-            <a:ext cx="3611880" cy="4206240"/>
+            <a:off x="548640" y="1554480"/>
+            <a:ext cx="5394960" cy="4160520"/>
           </a:xfrm>
           <a:prstGeom prst="roundRect">
             <a:avLst>
-              <a:gd name="adj" fmla="val 2025"/>
+              <a:gd name="adj" fmla="val 1758"/>
             </a:avLst>
           </a:prstGeom>
           <a:solidFill>
@@ -6192,34 +6803,14 @@
       </p:sp>
       <p:sp>
         <p:nvSpPr>
-          <p:cNvPr id="5" name="Shape 3"/>
-          <p:cNvSpPr/>
-          <p:nvPr/>
-        </p:nvSpPr>
-        <p:spPr>
-          <a:xfrm>
-            <a:off x="822960" y="1874520"/>
-            <a:ext cx="548640" cy="548640"/>
-          </a:xfrm>
-          <a:prstGeom prst="ellipse">
-            <a:avLst/>
-          </a:prstGeom>
-          <a:solidFill>
-            <a:srgbClr val="065A82"/>
-          </a:solidFill>
-          <a:ln/>
-        </p:spPr>
-      </p:sp>
-      <p:sp>
-        <p:nvSpPr>
-          <p:cNvPr id="6" name="Text 4"/>
-          <p:cNvSpPr txBox="1"/>
-          <p:nvPr/>
-        </p:nvSpPr>
-        <p:spPr>
-          <a:xfrm>
-            <a:off x="822960" y="1874520"/>
-            <a:ext cx="548640" cy="548640"/>
+          <p:cNvPr id="5" name="Text 3"/>
+          <p:cNvSpPr txBox="1"/>
+          <p:nvPr/>
+        </p:nvSpPr>
+        <p:spPr>
+          <a:xfrm>
+            <a:off x="822960" y="1783080"/>
+            <a:ext cx="4846320" cy="365760"/>
           </a:xfrm>
           <a:prstGeom prst="rect">
             <a:avLst/>
@@ -6231,21 +6822,60 @@
           <a:bodyPr wrap="square" lIns="0" tIns="0" rIns="0" bIns="0" rtlCol="0" anchor="ctr"/>
           <a:lstStyle/>
           <a:p>
-            <a:pPr algn="ctr" indent="0" marL="0">
-              <a:buNone/>
-            </a:pPr>
-            <a:r>
-              <a:rPr lang="en-US" sz="2200" b="1" dirty="0">
-                <a:solidFill>
-                  <a:srgbClr val="FFFFFF"/>
+            <a:pPr indent="0" marL="0">
+              <a:buNone/>
+            </a:pPr>
+            <a:r>
+              <a:rPr lang="en-US" sz="1500" b="1" dirty="0">
+                <a:solidFill>
+                  <a:srgbClr val="21295C"/>
                 </a:solidFill>
                 <a:latin typeface="Cambria" pitchFamily="34" charset="0"/>
                 <a:ea typeface="Cambria" pitchFamily="34" charset="-122"/>
                 <a:cs typeface="Cambria" pitchFamily="34" charset="-120"/>
               </a:rPr>
-              <a:t>1</a:t>
-            </a:r>
-            <a:endParaRPr lang="en-US" sz="2200" dirty="0"/>
+              <a:t>事例1｜常総市役所（茨城県）</a:t>
+            </a:r>
+            <a:endParaRPr lang="en-US" sz="1500" dirty="0"/>
+          </a:p>
+        </p:txBody>
+      </p:sp>
+      <p:sp>
+        <p:nvSpPr>
+          <p:cNvPr id="6" name="Text 4"/>
+          <p:cNvSpPr txBox="1"/>
+          <p:nvPr/>
+        </p:nvSpPr>
+        <p:spPr>
+          <a:xfrm>
+            <a:off x="822960" y="2148840"/>
+            <a:ext cx="4846320" cy="274320"/>
+          </a:xfrm>
+          <a:prstGeom prst="rect">
+            <a:avLst/>
+          </a:prstGeom>
+          <a:noFill/>
+          <a:ln/>
+        </p:spPr>
+        <p:txBody>
+          <a:bodyPr wrap="square" lIns="0" tIns="0" rIns="0" bIns="0" rtlCol="0" anchor="ctr"/>
+          <a:lstStyle/>
+          <a:p>
+            <a:pPr indent="0" marL="0">
+              <a:buNone/>
+            </a:pPr>
+            <a:r>
+              <a:rPr lang="en-US" sz="1100" b="1" dirty="0">
+                <a:solidFill>
+                  <a:srgbClr val="1C7293"/>
+                </a:solidFill>
+                <a:latin typeface="Calibri" pitchFamily="34" charset="0"/>
+                <a:ea typeface="Calibri" pitchFamily="34" charset="-122"/>
+                <a:cs typeface="Calibri" pitchFamily="34" charset="-120"/>
+              </a:rPr>
+              <a:t>平成27年9月　関東・東北豪雨</a:t>
+            </a:r>
+            <a:endParaRPr lang="en-US" sz="1100" dirty="0"/>
           </a:p>
         </p:txBody>
       </p:sp>
@@ -6257,47 +6887,8 @@
         </p:nvSpPr>
         <p:spPr>
           <a:xfrm>
-            <a:off x="822960" y="2560320"/>
-            <a:ext cx="3063240" cy="548640"/>
-          </a:xfrm>
-          <a:prstGeom prst="rect">
-            <a:avLst/>
-          </a:prstGeom>
-          <a:noFill/>
-          <a:ln/>
-        </p:spPr>
-        <p:txBody>
-          <a:bodyPr wrap="square" lIns="0" tIns="0" rIns="0" bIns="0" rtlCol="0" anchor="ctr"/>
-          <a:lstStyle/>
-          <a:p>
-            <a:pPr indent="0" marL="0">
-              <a:buNone/>
-            </a:pPr>
-            <a:r>
-              <a:rPr lang="en-US" sz="1700" b="1" dirty="0">
-                <a:solidFill>
-                  <a:srgbClr val="21295C"/>
-                </a:solidFill>
-                <a:latin typeface="Cambria" pitchFamily="34" charset="0"/>
-                <a:ea typeface="Cambria" pitchFamily="34" charset="-122"/>
-                <a:cs typeface="Cambria" pitchFamily="34" charset="-120"/>
-              </a:rPr>
-              <a:t>水災リスクの把握</a:t>
-            </a:r>
-            <a:endParaRPr lang="en-US" sz="1700" dirty="0"/>
-          </a:p>
-        </p:txBody>
-      </p:sp>
-      <p:sp>
-        <p:nvSpPr>
-          <p:cNvPr id="8" name="Text 6"/>
-          <p:cNvSpPr txBox="1"/>
-          <p:nvPr/>
-        </p:nvSpPr>
-        <p:spPr>
-          <a:xfrm>
-            <a:off x="822960" y="3200400"/>
-            <a:ext cx="3063240" cy="2377440"/>
+            <a:off x="822960" y="2514600"/>
+            <a:ext cx="4846320" cy="2468880"/>
           </a:xfrm>
           <a:prstGeom prst="rect">
             <a:avLst/>
@@ -6309,7 +6900,7 @@
           <a:bodyPr wrap="square" lIns="0" tIns="0" rIns="0" bIns="0" rtlCol="0" anchor="t"/>
           <a:lstStyle/>
           <a:p>
-            <a:pPr marL="203200" indent="-203200">
+            <a:pPr marL="228600" indent="-228600">
               <a:spcAft>
                 <a:spcPts val="1000"/>
               </a:spcAft>
@@ -6317,7 +6908,7 @@
               <a:buChar char="▪"/>
             </a:pPr>
             <a:r>
-              <a:rPr lang="en-US" sz="1150" dirty="0">
+              <a:rPr lang="en-US" sz="1250" dirty="0">
                 <a:solidFill>
                   <a:srgbClr val="1E2430"/>
                 </a:solidFill>
@@ -6325,12 +6916,12 @@
                 <a:ea typeface="Calibri" pitchFamily="34" charset="-122"/>
                 <a:cs typeface="Calibri" pitchFamily="34" charset="-120"/>
               </a:rPr>
-              <a:t>既存の洪水ハザードマップ・想定区域図・冠水実績箇所を部署横断で統合整理</a:t>
-            </a:r>
-            <a:endParaRPr lang="en-US" sz="1150" dirty="0"/>
-          </a:p>
-          <a:p>
-            <a:pPr marL="203200" indent="-203200">
+              <a:t>鬼怒川の氾濫により、災害対応拠点である市役所本庁舎が浸水</a:t>
+            </a:r>
+            <a:endParaRPr lang="en-US" sz="1250" dirty="0"/>
+          </a:p>
+          <a:p>
+            <a:pPr marL="228600" indent="-228600">
               <a:spcAft>
                 <a:spcPts val="1000"/>
               </a:spcAft>
@@ -6338,7 +6929,7 @@
               <a:buChar char="▪"/>
             </a:pPr>
             <a:r>
-              <a:rPr lang="en-US" sz="1150" dirty="0">
+              <a:rPr lang="en-US" sz="1250" dirty="0">
                 <a:solidFill>
                   <a:srgbClr val="1E2430"/>
                 </a:solidFill>
@@ -6346,12 +6937,12 @@
                 <a:ea typeface="Calibri" pitchFamily="34" charset="-122"/>
                 <a:cs typeface="Calibri" pitchFamily="34" charset="-120"/>
               </a:rPr>
-              <a:t>要配慮者施設・地下施設・低地部等、優先確認箇所のリスト化</a:t>
-            </a:r>
-            <a:endParaRPr lang="en-US" sz="1150" dirty="0"/>
-          </a:p>
-          <a:p>
-            <a:pPr marL="203200" indent="-203200">
+              <a:t>屋外設置の非常用電源設備が水没し使用不能に</a:t>
+            </a:r>
+            <a:endParaRPr lang="en-US" sz="1250" dirty="0"/>
+          </a:p>
+          <a:p>
+            <a:pPr marL="228600" indent="-228600">
               <a:spcAft>
                 <a:spcPts val="1000"/>
               </a:spcAft>
@@ -6359,7 +6950,7 @@
               <a:buChar char="▪"/>
             </a:pPr>
             <a:r>
-              <a:rPr lang="en-US" sz="1150" dirty="0">
+              <a:rPr lang="en-US" sz="1250" dirty="0">
                 <a:solidFill>
                   <a:srgbClr val="1E2430"/>
                 </a:solidFill>
@@ -6367,26 +6958,26 @@
                 <a:ea typeface="Calibri" pitchFamily="34" charset="-122"/>
                 <a:cs typeface="Calibri" pitchFamily="34" charset="-120"/>
               </a:rPr>
-              <a:t>過去の内水氾濫・道路冠水の被害履歴を収集整理</a:t>
-            </a:r>
-            <a:endParaRPr lang="en-US" sz="1150" dirty="0"/>
-          </a:p>
-        </p:txBody>
-      </p:sp>
-      <p:sp>
-        <p:nvSpPr>
-          <p:cNvPr id="9" name="Shape 7"/>
+              <a:t>災害対応の最中に庁舎自体の機能が失われる事態を招いた</a:t>
+            </a:r>
+            <a:endParaRPr lang="en-US" sz="1250" dirty="0"/>
+          </a:p>
+        </p:txBody>
+      </p:sp>
+      <p:sp>
+        <p:nvSpPr>
+          <p:cNvPr id="8" name="Shape 6"/>
           <p:cNvSpPr/>
           <p:nvPr/>
         </p:nvSpPr>
         <p:spPr>
           <a:xfrm>
-            <a:off x="4389120" y="1600200"/>
-            <a:ext cx="3611880" cy="4206240"/>
+            <a:off x="6263640" y="1554480"/>
+            <a:ext cx="5394960" cy="4160520"/>
           </a:xfrm>
           <a:prstGeom prst="roundRect">
             <a:avLst>
-              <a:gd name="adj" fmla="val 2025"/>
+              <a:gd name="adj" fmla="val 1758"/>
             </a:avLst>
           </a:prstGeom>
           <a:solidFill>
@@ -6397,34 +6988,14 @@
       </p:sp>
       <p:sp>
         <p:nvSpPr>
-          <p:cNvPr id="10" name="Shape 8"/>
-          <p:cNvSpPr/>
-          <p:nvPr/>
-        </p:nvSpPr>
-        <p:spPr>
-          <a:xfrm>
-            <a:off x="4663440" y="1874520"/>
-            <a:ext cx="548640" cy="548640"/>
-          </a:xfrm>
-          <a:prstGeom prst="ellipse">
-            <a:avLst/>
-          </a:prstGeom>
-          <a:solidFill>
-            <a:srgbClr val="FFFFFF"/>
-          </a:solidFill>
-          <a:ln/>
-        </p:spPr>
-      </p:sp>
-      <p:sp>
-        <p:nvSpPr>
-          <p:cNvPr id="11" name="Text 9"/>
-          <p:cNvSpPr txBox="1"/>
-          <p:nvPr/>
-        </p:nvSpPr>
-        <p:spPr>
-          <a:xfrm>
-            <a:off x="4663440" y="1874520"/>
-            <a:ext cx="548640" cy="548640"/>
+          <p:cNvPr id="9" name="Text 7"/>
+          <p:cNvSpPr txBox="1"/>
+          <p:nvPr/>
+        </p:nvSpPr>
+        <p:spPr>
+          <a:xfrm>
+            <a:off x="6537960" y="1783080"/>
+            <a:ext cx="4846320" cy="365760"/>
           </a:xfrm>
           <a:prstGeom prst="rect">
             <a:avLst/>
@@ -6436,34 +7007,34 @@
           <a:bodyPr wrap="square" lIns="0" tIns="0" rIns="0" bIns="0" rtlCol="0" anchor="ctr"/>
           <a:lstStyle/>
           <a:p>
-            <a:pPr algn="ctr" indent="0" marL="0">
-              <a:buNone/>
-            </a:pPr>
-            <a:r>
-              <a:rPr lang="en-US" sz="2200" b="1" dirty="0">
-                <a:solidFill>
-                  <a:srgbClr val="065A82"/>
+            <a:pPr indent="0" marL="0">
+              <a:buNone/>
+            </a:pPr>
+            <a:r>
+              <a:rPr lang="en-US" sz="1500" b="1" dirty="0">
+                <a:solidFill>
+                  <a:srgbClr val="FFFFFF"/>
                 </a:solidFill>
                 <a:latin typeface="Cambria" pitchFamily="34" charset="0"/>
                 <a:ea typeface="Cambria" pitchFamily="34" charset="-122"/>
                 <a:cs typeface="Cambria" pitchFamily="34" charset="-120"/>
               </a:rPr>
-              <a:t>2</a:t>
-            </a:r>
-            <a:endParaRPr lang="en-US" sz="2200" dirty="0"/>
-          </a:p>
-        </p:txBody>
-      </p:sp>
-      <p:sp>
-        <p:nvSpPr>
-          <p:cNvPr id="12" name="Text 10"/>
-          <p:cNvSpPr txBox="1"/>
-          <p:nvPr/>
-        </p:nvSpPr>
-        <p:spPr>
-          <a:xfrm>
-            <a:off x="4663440" y="2560320"/>
-            <a:ext cx="3063240" cy="548640"/>
+              <a:t>事例2｜日立市役所（茨城県）</a:t>
+            </a:r>
+            <a:endParaRPr lang="en-US" sz="1500" dirty="0"/>
+          </a:p>
+        </p:txBody>
+      </p:sp>
+      <p:sp>
+        <p:nvSpPr>
+          <p:cNvPr id="10" name="Text 8"/>
+          <p:cNvSpPr txBox="1"/>
+          <p:nvPr/>
+        </p:nvSpPr>
+        <p:spPr>
+          <a:xfrm>
+            <a:off x="6537960" y="2148840"/>
+            <a:ext cx="4846320" cy="274320"/>
           </a:xfrm>
           <a:prstGeom prst="rect">
             <a:avLst/>
@@ -6479,30 +7050,30 @@
               <a:buNone/>
             </a:pPr>
             <a:r>
-              <a:rPr lang="en-US" sz="1700" b="1" dirty="0">
-                <a:solidFill>
-                  <a:srgbClr val="FFFFFF"/>
-                </a:solidFill>
-                <a:latin typeface="Cambria" pitchFamily="34" charset="0"/>
-                <a:ea typeface="Cambria" pitchFamily="34" charset="-122"/>
-                <a:cs typeface="Cambria" pitchFamily="34" charset="-120"/>
-              </a:rPr>
-              <a:t>庁内サーベイの実施</a:t>
-            </a:r>
-            <a:endParaRPr lang="en-US" sz="1700" dirty="0"/>
-          </a:p>
-        </p:txBody>
-      </p:sp>
-      <p:sp>
-        <p:nvSpPr>
-          <p:cNvPr id="13" name="Text 11"/>
-          <p:cNvSpPr txBox="1"/>
-          <p:nvPr/>
-        </p:nvSpPr>
-        <p:spPr>
-          <a:xfrm>
-            <a:off x="4663440" y="3200400"/>
-            <a:ext cx="3063240" cy="2377440"/>
+              <a:rPr lang="en-US" sz="1100" b="1" dirty="0">
+                <a:solidFill>
+                  <a:srgbClr val="CFE3ED"/>
+                </a:solidFill>
+                <a:latin typeface="Calibri" pitchFamily="34" charset="0"/>
+                <a:ea typeface="Calibri" pitchFamily="34" charset="-122"/>
+                <a:cs typeface="Calibri" pitchFamily="34" charset="-120"/>
+              </a:rPr>
+              <a:t>令和5年9月　台風13号</a:t>
+            </a:r>
+            <a:endParaRPr lang="en-US" sz="1100" dirty="0"/>
+          </a:p>
+        </p:txBody>
+      </p:sp>
+      <p:sp>
+        <p:nvSpPr>
+          <p:cNvPr id="11" name="Text 9"/>
+          <p:cNvSpPr txBox="1"/>
+          <p:nvPr/>
+        </p:nvSpPr>
+        <p:spPr>
+          <a:xfrm>
+            <a:off x="6537960" y="2514600"/>
+            <a:ext cx="4846320" cy="3017520"/>
           </a:xfrm>
           <a:prstGeom prst="rect">
             <a:avLst/>
@@ -6514,7 +7085,7 @@
           <a:bodyPr wrap="square" lIns="0" tIns="0" rIns="0" bIns="0" rtlCol="0" anchor="t"/>
           <a:lstStyle/>
           <a:p>
-            <a:pPr marL="203200" indent="-203200">
+            <a:pPr marL="228600" indent="-228600">
               <a:spcAft>
                 <a:spcPts val="1000"/>
               </a:spcAft>
@@ -6522,7 +7093,7 @@
               <a:buChar char="▪"/>
             </a:pPr>
             <a:r>
-              <a:rPr lang="en-US" sz="1150" dirty="0">
+              <a:rPr lang="en-US" sz="1250" dirty="0">
                 <a:solidFill>
                   <a:srgbClr val="CFE3ED"/>
                 </a:solidFill>
@@ -6530,12 +7101,12 @@
                 <a:ea typeface="Calibri" pitchFamily="34" charset="-122"/>
                 <a:cs typeface="Calibri" pitchFamily="34" charset="-120"/>
               </a:rPr>
-              <a:t>関係部署（防災対策課、道路管理担当課、上下水道局、福祉部門等）へのヒアリング</a:t>
-            </a:r>
-            <a:endParaRPr lang="en-US" sz="1150" dirty="0"/>
-          </a:p>
-          <a:p>
-            <a:pPr marL="203200" indent="-203200">
+              <a:t>近接する河川の合流部からの越水で地下1階の機械室が最大約120cm浸水、全電源を約1日喪失</a:t>
+            </a:r>
+            <a:endParaRPr lang="en-US" sz="1250" dirty="0"/>
+          </a:p>
+          <a:p>
+            <a:pPr marL="228600" indent="-228600">
               <a:spcAft>
                 <a:spcPts val="1000"/>
               </a:spcAft>
@@ -6543,7 +7114,7 @@
               <a:buChar char="▪"/>
             </a:pPr>
             <a:r>
-              <a:rPr lang="en-US" sz="1150" dirty="0">
+              <a:rPr lang="en-US" sz="1250" dirty="0">
                 <a:solidFill>
                   <a:srgbClr val="CFE3ED"/>
                 </a:solidFill>
@@ -6551,12 +7122,12 @@
                 <a:ea typeface="Calibri" pitchFamily="34" charset="-122"/>
                 <a:cs typeface="Calibri" pitchFamily="34" charset="-120"/>
               </a:rPr>
-              <a:t>過去の豪雨対応時における課題・困りごとの洗い出し</a:t>
-            </a:r>
-            <a:endParaRPr lang="en-US" sz="1150" dirty="0"/>
-          </a:p>
-          <a:p>
-            <a:pPr marL="203200" indent="-203200">
+              <a:t>災害対策本部は消防本部へ移転、窓口業務停止・電話も一部不通に</a:t>
+            </a:r>
+            <a:endParaRPr lang="en-US" sz="1250" dirty="0"/>
+          </a:p>
+          <a:p>
+            <a:pPr marL="228600" indent="-228600">
               <a:spcAft>
                 <a:spcPts val="1000"/>
               </a:spcAft>
@@ -6564,7 +7135,7 @@
               <a:buChar char="▪"/>
             </a:pPr>
             <a:r>
-              <a:rPr lang="en-US" sz="1150" dirty="0">
+              <a:rPr lang="en-US" sz="1250" dirty="0">
                 <a:solidFill>
                   <a:srgbClr val="CFE3ED"/>
                 </a:solidFill>
@@ -6572,64 +7143,22 @@
                 <a:ea typeface="Calibri" pitchFamily="34" charset="-122"/>
                 <a:cs typeface="Calibri" pitchFamily="34" charset="-120"/>
               </a:rPr>
-              <a:t>現場職員の対応実態に関するアンケート調査</a:t>
-            </a:r>
-            <a:endParaRPr lang="en-US" sz="1150" dirty="0"/>
-          </a:p>
-        </p:txBody>
-      </p:sp>
-      <p:sp>
-        <p:nvSpPr>
-          <p:cNvPr id="14" name="Shape 12"/>
-          <p:cNvSpPr/>
-          <p:nvPr/>
-        </p:nvSpPr>
-        <p:spPr>
-          <a:xfrm>
-            <a:off x="8229600" y="1600200"/>
-            <a:ext cx="3611880" cy="4206240"/>
-          </a:xfrm>
-          <a:prstGeom prst="roundRect">
-            <a:avLst>
-              <a:gd name="adj" fmla="val 2025"/>
-            </a:avLst>
-          </a:prstGeom>
-          <a:solidFill>
-            <a:srgbClr val="F4F8FA"/>
-          </a:solidFill>
-          <a:ln/>
-        </p:spPr>
-      </p:sp>
-      <p:sp>
-        <p:nvSpPr>
-          <p:cNvPr id="15" name="Shape 13"/>
-          <p:cNvSpPr/>
-          <p:nvPr/>
-        </p:nvSpPr>
-        <p:spPr>
-          <a:xfrm>
-            <a:off x="8503920" y="1874520"/>
-            <a:ext cx="548640" cy="548640"/>
-          </a:xfrm>
-          <a:prstGeom prst="ellipse">
-            <a:avLst/>
-          </a:prstGeom>
-          <a:solidFill>
-            <a:srgbClr val="065A82"/>
-          </a:solidFill>
-          <a:ln/>
-        </p:spPr>
-      </p:sp>
-      <p:sp>
-        <p:nvSpPr>
-          <p:cNvPr id="16" name="Text 14"/>
-          <p:cNvSpPr txBox="1"/>
-          <p:nvPr/>
-        </p:nvSpPr>
-        <p:spPr>
-          <a:xfrm>
-            <a:off x="8503920" y="1874520"/>
-            <a:ext cx="548640" cy="548640"/>
+              <a:t>「災害に強い庁舎」として約100億円で建設（令和元年）も、地下集中配置の設計が弱点に。復旧に2億円超</a:t>
+            </a:r>
+            <a:endParaRPr lang="en-US" sz="1250" dirty="0"/>
+          </a:p>
+        </p:txBody>
+      </p:sp>
+      <p:sp>
+        <p:nvSpPr>
+          <p:cNvPr id="12" name="Text 10"/>
+          <p:cNvSpPr txBox="1"/>
+          <p:nvPr/>
+        </p:nvSpPr>
+        <p:spPr>
+          <a:xfrm>
+            <a:off x="548640" y="5715000"/>
+            <a:ext cx="11064240" cy="274320"/>
           </a:xfrm>
           <a:prstGeom prst="rect">
             <a:avLst/>
@@ -6641,34 +7170,34 @@
           <a:bodyPr wrap="square" lIns="0" tIns="0" rIns="0" bIns="0" rtlCol="0" anchor="ctr"/>
           <a:lstStyle/>
           <a:p>
-            <a:pPr algn="ctr" indent="0" marL="0">
-              <a:buNone/>
-            </a:pPr>
-            <a:r>
-              <a:rPr lang="en-US" sz="2200" b="1" dirty="0">
-                <a:solidFill>
-                  <a:srgbClr val="FFFFFF"/>
-                </a:solidFill>
-                <a:latin typeface="Cambria" pitchFamily="34" charset="0"/>
-                <a:ea typeface="Cambria" pitchFamily="34" charset="-122"/>
-                <a:cs typeface="Cambria" pitchFamily="34" charset="-120"/>
-              </a:rPr>
-              <a:t>3</a:t>
-            </a:r>
-            <a:endParaRPr lang="en-US" sz="2200" dirty="0"/>
-          </a:p>
-        </p:txBody>
-      </p:sp>
-      <p:sp>
-        <p:nvSpPr>
-          <p:cNvPr id="17" name="Text 15"/>
-          <p:cNvSpPr txBox="1"/>
-          <p:nvPr/>
-        </p:nvSpPr>
-        <p:spPr>
-          <a:xfrm>
-            <a:off x="8503920" y="2560320"/>
-            <a:ext cx="3063240" cy="548640"/>
+            <a:pPr indent="0" marL="0">
+              <a:buNone/>
+            </a:pPr>
+            <a:r>
+              <a:rPr lang="en-US" sz="1050" dirty="0">
+                <a:solidFill>
+                  <a:srgbClr val="5B6B76"/>
+                </a:solidFill>
+                <a:latin typeface="Calibri" pitchFamily="34" charset="0"/>
+                <a:ea typeface="Calibri" pitchFamily="34" charset="-122"/>
+                <a:cs typeface="Calibri" pitchFamily="34" charset="-120"/>
+              </a:rPr>
+              <a:t>参考：宮城県丸森町役場（令和元年台風19号）でも庁舎周辺が冠水し孤立、通信手段が防災無線のみに限られる時間帯が発生</a:t>
+            </a:r>
+            <a:endParaRPr lang="en-US" sz="1050" dirty="0"/>
+          </a:p>
+        </p:txBody>
+      </p:sp>
+      <p:sp>
+        <p:nvSpPr>
+          <p:cNvPr id="13" name="Text 11"/>
+          <p:cNvSpPr txBox="1"/>
+          <p:nvPr/>
+        </p:nvSpPr>
+        <p:spPr>
+          <a:xfrm>
+            <a:off x="548640" y="6016752"/>
+            <a:ext cx="11064240" cy="320040"/>
           </a:xfrm>
           <a:prstGeom prst="rect">
             <a:avLst/>
@@ -6684,108 +7213,62 @@
               <a:buNone/>
             </a:pPr>
             <a:r>
-              <a:rPr lang="en-US" sz="1700" b="1" dirty="0">
+              <a:rPr lang="en-US" sz="1250" b="1" i="1" dirty="0">
                 <a:solidFill>
                   <a:srgbClr val="21295C"/>
                 </a:solidFill>
-                <a:latin typeface="Cambria" pitchFamily="34" charset="0"/>
-                <a:ea typeface="Cambria" pitchFamily="34" charset="-122"/>
-                <a:cs typeface="Cambria" pitchFamily="34" charset="-120"/>
-              </a:rPr>
-              <a:t>対応マニュアルの作成</a:t>
-            </a:r>
-            <a:endParaRPr lang="en-US" sz="1700" dirty="0"/>
-          </a:p>
-        </p:txBody>
-      </p:sp>
-      <p:sp>
-        <p:nvSpPr>
-          <p:cNvPr id="18" name="Text 16"/>
-          <p:cNvSpPr txBox="1"/>
-          <p:nvPr/>
-        </p:nvSpPr>
-        <p:spPr>
-          <a:xfrm>
-            <a:off x="8503920" y="3200400"/>
-            <a:ext cx="3063240" cy="2377440"/>
-          </a:xfrm>
-          <a:prstGeom prst="rect">
-            <a:avLst/>
-          </a:prstGeom>
-          <a:noFill/>
-          <a:ln/>
-        </p:spPr>
-        <p:txBody>
-          <a:bodyPr wrap="square" lIns="0" tIns="0" rIns="0" bIns="0" rtlCol="0" anchor="t"/>
-          <a:lstStyle/>
-          <a:p>
-            <a:pPr marL="203200" indent="-203200">
-              <a:spcAft>
-                <a:spcPts val="1000"/>
-              </a:spcAft>
-              <a:buSzPct val="100000"/>
-              <a:buChar char="▪"/>
-            </a:pPr>
-            <a:r>
-              <a:rPr lang="en-US" sz="1150" dirty="0">
-                <a:solidFill>
-                  <a:srgbClr val="1E2430"/>
-                </a:solidFill>
-                <a:latin typeface="Calibri" pitchFamily="34" charset="0"/>
-                <a:ea typeface="Calibri" pitchFamily="34" charset="-122"/>
-                <a:cs typeface="Calibri" pitchFamily="34" charset="-120"/>
-              </a:rPr>
-              <a:t>豪雨発生時の初動対応フロー（警戒レベル別）の整理</a:t>
-            </a:r>
-            <a:endParaRPr lang="en-US" sz="1150" dirty="0"/>
-          </a:p>
-          <a:p>
-            <a:pPr marL="203200" indent="-203200">
-              <a:spcAft>
-                <a:spcPts val="1000"/>
-              </a:spcAft>
-              <a:buSzPct val="100000"/>
-              <a:buChar char="▪"/>
-            </a:pPr>
-            <a:r>
-              <a:rPr lang="en-US" sz="1150" dirty="0">
-                <a:solidFill>
-                  <a:srgbClr val="1E2430"/>
-                </a:solidFill>
-                <a:latin typeface="Calibri" pitchFamily="34" charset="0"/>
-                <a:ea typeface="Calibri" pitchFamily="34" charset="-122"/>
-                <a:cs typeface="Calibri" pitchFamily="34" charset="-120"/>
-              </a:rPr>
-              <a:t>参集基準・非常配備体制の明文化</a:t>
-            </a:r>
-            <a:endParaRPr lang="en-US" sz="1150" dirty="0"/>
-          </a:p>
-          <a:p>
-            <a:pPr marL="203200" indent="-203200">
-              <a:spcAft>
-                <a:spcPts val="1000"/>
-              </a:spcAft>
-              <a:buSzPct val="100000"/>
-              <a:buChar char="▪"/>
-            </a:pPr>
-            <a:r>
-              <a:rPr lang="en-US" sz="1150" dirty="0">
-                <a:solidFill>
-                  <a:srgbClr val="1E2430"/>
-                </a:solidFill>
-                <a:latin typeface="Calibri" pitchFamily="34" charset="0"/>
-                <a:ea typeface="Calibri" pitchFamily="34" charset="-122"/>
-                <a:cs typeface="Calibri" pitchFamily="34" charset="-120"/>
-              </a:rPr>
-              <a:t>部署別役割分担・情報共有ルートの明確化、試行運用を経て全庁展開</a:t>
-            </a:r>
-            <a:endParaRPr lang="en-US" sz="1150" dirty="0"/>
-          </a:p>
-        </p:txBody>
-      </p:sp>
-      <p:sp>
-        <p:nvSpPr>
-          <p:cNvPr id="19" name="Text 17"/>
+                <a:latin typeface="Calibri" pitchFamily="34" charset="0"/>
+                <a:ea typeface="Calibri" pitchFamily="34" charset="-122"/>
+                <a:cs typeface="Calibri" pitchFamily="34" charset="-120"/>
+              </a:rPr>
+              <a:t>教訓：地震への備えは重視されても、浸水による庁舎自体の機能停止・孤立リスクは見落とされやすい</a:t>
+            </a:r>
+            <a:endParaRPr lang="en-US" sz="1250" dirty="0"/>
+          </a:p>
+        </p:txBody>
+      </p:sp>
+      <p:sp>
+        <p:nvSpPr>
+          <p:cNvPr id="14" name="Text 12"/>
+          <p:cNvSpPr txBox="1"/>
+          <p:nvPr/>
+        </p:nvSpPr>
+        <p:spPr>
+          <a:xfrm>
+            <a:off x="548640" y="6355080"/>
+            <a:ext cx="11064240" cy="228600"/>
+          </a:xfrm>
+          <a:prstGeom prst="rect">
+            <a:avLst/>
+          </a:prstGeom>
+          <a:noFill/>
+          <a:ln/>
+        </p:spPr>
+        <p:txBody>
+          <a:bodyPr wrap="square" lIns="0" tIns="0" rIns="0" bIns="0" rtlCol="0" anchor="ctr"/>
+          <a:lstStyle/>
+          <a:p>
+            <a:pPr indent="0" marL="0">
+              <a:buNone/>
+            </a:pPr>
+            <a:r>
+              <a:rPr lang="en-US" sz="800" dirty="0">
+                <a:solidFill>
+                  <a:srgbClr val="5B6B76"/>
+                </a:solidFill>
+                <a:latin typeface="Calibri" pitchFamily="34" charset="0"/>
+                <a:ea typeface="Calibri" pitchFamily="34" charset="-122"/>
+                <a:cs typeface="Calibri" pitchFamily="34" charset="-120"/>
+              </a:rPr>
+              <a:t>出典：国土交通省 社会資本整備審議会河川分科会「まちづくりと連携した水災害対策について」（令和2年1月）／日立市公式サイト（本庁舎浸水対策に関する在り方検討ワーキング）</a:t>
+            </a:r>
+            <a:endParaRPr lang="en-US" sz="800" dirty="0"/>
+          </a:p>
+        </p:txBody>
+      </p:sp>
+      <p:sp>
+        <p:nvSpPr>
+          <p:cNvPr id="15" name="Text 13"/>
           <p:cNvSpPr txBox="1"/>
           <p:nvPr/>
         </p:nvSpPr>
@@ -6824,7 +7307,7 @@
       </p:sp>
       <p:sp>
         <p:nvSpPr>
-          <p:cNvPr id="20" name="Text 18"/>
+          <p:cNvPr id="16" name="Text 14"/>
           <p:cNvSpPr txBox="1"/>
           <p:nvPr/>
         </p:nvSpPr>
@@ -6926,7 +7409,7 @@
                 <a:ea typeface="Calibri" pitchFamily="34" charset="-122"/>
                 <a:cs typeface="Calibri" pitchFamily="34" charset="-120"/>
               </a:rPr>
-              <a:t>6｜実施スケジュール（単年度事業）</a:t>
+              <a:t>6｜提案内容</a:t>
             </a:r>
             <a:endParaRPr lang="en-US" sz="1300" dirty="0"/>
           </a:p>
@@ -6965,7 +7448,7 @@
                 <a:ea typeface="Cambria" pitchFamily="34" charset="-122"/>
                 <a:cs typeface="Cambria" pitchFamily="34" charset="-120"/>
               </a:rPr>
-              <a:t>内製中心・4四半期での完結</a:t>
+              <a:t>内水氾濫に特化した3本柱</a:t>
             </a:r>
             <a:endParaRPr lang="en-US" sz="2800" dirty="0"/>
           </a:p>
@@ -6979,19 +7462,18 @@
         </p:nvSpPr>
         <p:spPr>
           <a:xfrm>
-            <a:off x="1920240" y="2697480"/>
-            <a:ext cx="8321040" cy="0"/>
-          </a:xfrm>
-          <a:prstGeom prst="line">
-            <a:avLst/>
-          </a:prstGeom>
-          <a:noFill/>
-          <a:ln w="25400">
-            <a:solidFill>
-              <a:srgbClr val="1C7293"/>
-            </a:solidFill>
-            <a:prstDash val="solid"/>
-          </a:ln>
+            <a:off x="548640" y="1600200"/>
+            <a:ext cx="3611880" cy="4206240"/>
+          </a:xfrm>
+          <a:prstGeom prst="roundRect">
+            <a:avLst>
+              <a:gd name="adj" fmla="val 2025"/>
+            </a:avLst>
+          </a:prstGeom>
+          <a:solidFill>
+            <a:srgbClr val="F4F8FA"/>
+          </a:solidFill>
+          <a:ln/>
         </p:spPr>
       </p:sp>
       <p:sp>
@@ -7002,7 +7484,7 @@
         </p:nvSpPr>
         <p:spPr>
           <a:xfrm>
-            <a:off x="1645920" y="2423160"/>
+            <a:off x="822960" y="1874520"/>
             <a:ext cx="548640" cy="548640"/>
           </a:xfrm>
           <a:prstGeom prst="ellipse">
@@ -7011,12 +7493,7 @@
           <a:solidFill>
             <a:srgbClr val="065A82"/>
           </a:solidFill>
-          <a:ln w="25400">
-            <a:solidFill>
-              <a:srgbClr val="FFFFFF"/>
-            </a:solidFill>
-            <a:prstDash val="solid"/>
-          </a:ln>
+          <a:ln/>
         </p:spPr>
       </p:sp>
       <p:sp>
@@ -7027,7 +7504,7 @@
         </p:nvSpPr>
         <p:spPr>
           <a:xfrm>
-            <a:off x="1645920" y="2423160"/>
+            <a:off x="822960" y="1874520"/>
             <a:ext cx="548640" cy="548640"/>
           </a:xfrm>
           <a:prstGeom prst="rect">
@@ -7044,7 +7521,7 @@
               <a:buNone/>
             </a:pPr>
             <a:r>
-              <a:rPr lang="en-US" sz="1800" b="1" dirty="0">
+              <a:rPr lang="en-US" sz="2200" b="1" dirty="0">
                 <a:solidFill>
                   <a:srgbClr val="FFFFFF"/>
                 </a:solidFill>
@@ -7054,7 +7531,7 @@
               </a:rPr>
               <a:t>1</a:t>
             </a:r>
-            <a:endParaRPr lang="en-US" sz="1800" dirty="0"/>
+            <a:endParaRPr lang="en-US" sz="2200" dirty="0"/>
           </a:p>
         </p:txBody>
       </p:sp>
@@ -7066,8 +7543,8 @@
         </p:nvSpPr>
         <p:spPr>
           <a:xfrm>
-            <a:off x="777240" y="3154680"/>
-            <a:ext cx="2286000" cy="320040"/>
+            <a:off x="822960" y="2560320"/>
+            <a:ext cx="3063240" cy="548640"/>
           </a:xfrm>
           <a:prstGeom prst="rect">
             <a:avLst/>
@@ -7079,38 +7556,328 @@
           <a:bodyPr wrap="square" lIns="0" tIns="0" rIns="0" bIns="0" rtlCol="0" anchor="ctr"/>
           <a:lstStyle/>
           <a:p>
-            <a:pPr algn="ctr" indent="0" marL="0">
-              <a:buNone/>
-            </a:pPr>
-            <a:r>
-              <a:rPr lang="en-US" sz="1200" b="1" dirty="0">
-                <a:solidFill>
-                  <a:srgbClr val="1C7293"/>
-                </a:solidFill>
-                <a:latin typeface="Calibri" pitchFamily="34" charset="0"/>
-                <a:ea typeface="Calibri" pitchFamily="34" charset="-122"/>
-                <a:cs typeface="Calibri" pitchFamily="34" charset="-120"/>
-              </a:rPr>
-              <a:t>第1四半期</a:t>
-            </a:r>
-            <a:endParaRPr lang="en-US" sz="1200" dirty="0"/>
-          </a:p>
-        </p:txBody>
-      </p:sp>
-      <p:sp>
-        <p:nvSpPr>
-          <p:cNvPr id="8" name="Shape 6"/>
+            <a:pPr indent="0" marL="0">
+              <a:buNone/>
+            </a:pPr>
+            <a:r>
+              <a:rPr lang="en-US" sz="1700" b="1" dirty="0">
+                <a:solidFill>
+                  <a:srgbClr val="21295C"/>
+                </a:solidFill>
+                <a:latin typeface="Cambria" pitchFamily="34" charset="0"/>
+                <a:ea typeface="Cambria" pitchFamily="34" charset="-122"/>
+                <a:cs typeface="Cambria" pitchFamily="34" charset="-120"/>
+              </a:rPr>
+              <a:t>水災リスクの把握</a:t>
+            </a:r>
+            <a:endParaRPr lang="en-US" sz="1700" dirty="0"/>
+          </a:p>
+        </p:txBody>
+      </p:sp>
+      <p:sp>
+        <p:nvSpPr>
+          <p:cNvPr id="8" name="Text 6"/>
+          <p:cNvSpPr txBox="1"/>
+          <p:nvPr/>
+        </p:nvSpPr>
+        <p:spPr>
+          <a:xfrm>
+            <a:off x="822960" y="3200400"/>
+            <a:ext cx="3063240" cy="2377440"/>
+          </a:xfrm>
+          <a:prstGeom prst="rect">
+            <a:avLst/>
+          </a:prstGeom>
+          <a:noFill/>
+          <a:ln/>
+        </p:spPr>
+        <p:txBody>
+          <a:bodyPr wrap="square" lIns="0" tIns="0" rIns="0" bIns="0" rtlCol="0" anchor="t"/>
+          <a:lstStyle/>
+          <a:p>
+            <a:pPr marL="203200" indent="-203200">
+              <a:spcAft>
+                <a:spcPts val="1000"/>
+              </a:spcAft>
+              <a:buSzPct val="100000"/>
+              <a:buChar char="▪"/>
+            </a:pPr>
+            <a:r>
+              <a:rPr lang="en-US" sz="1150" dirty="0">
+                <a:solidFill>
+                  <a:srgbClr val="1E2430"/>
+                </a:solidFill>
+                <a:latin typeface="Calibri" pitchFamily="34" charset="0"/>
+                <a:ea typeface="Calibri" pitchFamily="34" charset="-122"/>
+                <a:cs typeface="Calibri" pitchFamily="34" charset="-120"/>
+              </a:rPr>
+              <a:t>既存の洪水ハザードマップ・想定区域図・冠水実績箇所を部署横断で統合整理</a:t>
+            </a:r>
+            <a:endParaRPr lang="en-US" sz="1150" dirty="0"/>
+          </a:p>
+          <a:p>
+            <a:pPr marL="203200" indent="-203200">
+              <a:spcAft>
+                <a:spcPts val="1000"/>
+              </a:spcAft>
+              <a:buSzPct val="100000"/>
+              <a:buChar char="▪"/>
+            </a:pPr>
+            <a:r>
+              <a:rPr lang="en-US" sz="1150" dirty="0">
+                <a:solidFill>
+                  <a:srgbClr val="1E2430"/>
+                </a:solidFill>
+                <a:latin typeface="Calibri" pitchFamily="34" charset="0"/>
+                <a:ea typeface="Calibri" pitchFamily="34" charset="-122"/>
+                <a:cs typeface="Calibri" pitchFamily="34" charset="-120"/>
+              </a:rPr>
+              <a:t>本庁舎・支所等の重要設備（受変電設備・非常用電源等）と浸水想定区域との位置関係を確認</a:t>
+            </a:r>
+            <a:endParaRPr lang="en-US" sz="1150" dirty="0"/>
+          </a:p>
+          <a:p>
+            <a:pPr marL="203200" indent="-203200">
+              <a:spcAft>
+                <a:spcPts val="1000"/>
+              </a:spcAft>
+              <a:buSzPct val="100000"/>
+              <a:buChar char="▪"/>
+            </a:pPr>
+            <a:r>
+              <a:rPr lang="en-US" sz="1150" dirty="0">
+                <a:solidFill>
+                  <a:srgbClr val="1E2430"/>
+                </a:solidFill>
+                <a:latin typeface="Calibri" pitchFamily="34" charset="0"/>
+                <a:ea typeface="Calibri" pitchFamily="34" charset="-122"/>
+                <a:cs typeface="Calibri" pitchFamily="34" charset="-120"/>
+              </a:rPr>
+              <a:t>要配慮者施設・地下施設・低地部等、優先確認箇所のリスト化</a:t>
+            </a:r>
+            <a:endParaRPr lang="en-US" sz="1150" dirty="0"/>
+          </a:p>
+        </p:txBody>
+      </p:sp>
+      <p:sp>
+        <p:nvSpPr>
+          <p:cNvPr id="9" name="Shape 7"/>
           <p:cNvSpPr/>
           <p:nvPr/>
         </p:nvSpPr>
         <p:spPr>
           <a:xfrm>
-            <a:off x="777240" y="3520440"/>
-            <a:ext cx="2286000" cy="1737360"/>
+            <a:off x="4389120" y="1600200"/>
+            <a:ext cx="3611880" cy="4206240"/>
           </a:xfrm>
           <a:prstGeom prst="roundRect">
             <a:avLst>
-              <a:gd name="adj" fmla="val 4211"/>
+              <a:gd name="adj" fmla="val 2025"/>
+            </a:avLst>
+          </a:prstGeom>
+          <a:solidFill>
+            <a:srgbClr val="065A82"/>
+          </a:solidFill>
+          <a:ln/>
+        </p:spPr>
+      </p:sp>
+      <p:sp>
+        <p:nvSpPr>
+          <p:cNvPr id="10" name="Shape 8"/>
+          <p:cNvSpPr/>
+          <p:nvPr/>
+        </p:nvSpPr>
+        <p:spPr>
+          <a:xfrm>
+            <a:off x="4663440" y="1874520"/>
+            <a:ext cx="548640" cy="548640"/>
+          </a:xfrm>
+          <a:prstGeom prst="ellipse">
+            <a:avLst/>
+          </a:prstGeom>
+          <a:solidFill>
+            <a:srgbClr val="FFFFFF"/>
+          </a:solidFill>
+          <a:ln/>
+        </p:spPr>
+      </p:sp>
+      <p:sp>
+        <p:nvSpPr>
+          <p:cNvPr id="11" name="Text 9"/>
+          <p:cNvSpPr txBox="1"/>
+          <p:nvPr/>
+        </p:nvSpPr>
+        <p:spPr>
+          <a:xfrm>
+            <a:off x="4663440" y="1874520"/>
+            <a:ext cx="548640" cy="548640"/>
+          </a:xfrm>
+          <a:prstGeom prst="rect">
+            <a:avLst/>
+          </a:prstGeom>
+          <a:noFill/>
+          <a:ln/>
+        </p:spPr>
+        <p:txBody>
+          <a:bodyPr wrap="square" lIns="0" tIns="0" rIns="0" bIns="0" rtlCol="0" anchor="ctr"/>
+          <a:lstStyle/>
+          <a:p>
+            <a:pPr algn="ctr" indent="0" marL="0">
+              <a:buNone/>
+            </a:pPr>
+            <a:r>
+              <a:rPr lang="en-US" sz="2200" b="1" dirty="0">
+                <a:solidFill>
+                  <a:srgbClr val="065A82"/>
+                </a:solidFill>
+                <a:latin typeface="Cambria" pitchFamily="34" charset="0"/>
+                <a:ea typeface="Cambria" pitchFamily="34" charset="-122"/>
+                <a:cs typeface="Cambria" pitchFamily="34" charset="-120"/>
+              </a:rPr>
+              <a:t>2</a:t>
+            </a:r>
+            <a:endParaRPr lang="en-US" sz="2200" dirty="0"/>
+          </a:p>
+        </p:txBody>
+      </p:sp>
+      <p:sp>
+        <p:nvSpPr>
+          <p:cNvPr id="12" name="Text 10"/>
+          <p:cNvSpPr txBox="1"/>
+          <p:nvPr/>
+        </p:nvSpPr>
+        <p:spPr>
+          <a:xfrm>
+            <a:off x="4663440" y="2560320"/>
+            <a:ext cx="3063240" cy="548640"/>
+          </a:xfrm>
+          <a:prstGeom prst="rect">
+            <a:avLst/>
+          </a:prstGeom>
+          <a:noFill/>
+          <a:ln/>
+        </p:spPr>
+        <p:txBody>
+          <a:bodyPr wrap="square" lIns="0" tIns="0" rIns="0" bIns="0" rtlCol="0" anchor="ctr"/>
+          <a:lstStyle/>
+          <a:p>
+            <a:pPr indent="0" marL="0">
+              <a:buNone/>
+            </a:pPr>
+            <a:r>
+              <a:rPr lang="en-US" sz="1700" b="1" dirty="0">
+                <a:solidFill>
+                  <a:srgbClr val="FFFFFF"/>
+                </a:solidFill>
+                <a:latin typeface="Cambria" pitchFamily="34" charset="0"/>
+                <a:ea typeface="Cambria" pitchFamily="34" charset="-122"/>
+                <a:cs typeface="Cambria" pitchFamily="34" charset="-120"/>
+              </a:rPr>
+              <a:t>庁内サーベイの実施</a:t>
+            </a:r>
+            <a:endParaRPr lang="en-US" sz="1700" dirty="0"/>
+          </a:p>
+        </p:txBody>
+      </p:sp>
+      <p:sp>
+        <p:nvSpPr>
+          <p:cNvPr id="13" name="Text 11"/>
+          <p:cNvSpPr txBox="1"/>
+          <p:nvPr/>
+        </p:nvSpPr>
+        <p:spPr>
+          <a:xfrm>
+            <a:off x="4663440" y="3200400"/>
+            <a:ext cx="3063240" cy="2377440"/>
+          </a:xfrm>
+          <a:prstGeom prst="rect">
+            <a:avLst/>
+          </a:prstGeom>
+          <a:noFill/>
+          <a:ln/>
+        </p:spPr>
+        <p:txBody>
+          <a:bodyPr wrap="square" lIns="0" tIns="0" rIns="0" bIns="0" rtlCol="0" anchor="t"/>
+          <a:lstStyle/>
+          <a:p>
+            <a:pPr marL="203200" indent="-203200">
+              <a:spcAft>
+                <a:spcPts val="1000"/>
+              </a:spcAft>
+              <a:buSzPct val="100000"/>
+              <a:buChar char="▪"/>
+            </a:pPr>
+            <a:r>
+              <a:rPr lang="en-US" sz="1150" dirty="0">
+                <a:solidFill>
+                  <a:srgbClr val="CFE3ED"/>
+                </a:solidFill>
+                <a:latin typeface="Calibri" pitchFamily="34" charset="0"/>
+                <a:ea typeface="Calibri" pitchFamily="34" charset="-122"/>
+                <a:cs typeface="Calibri" pitchFamily="34" charset="-120"/>
+              </a:rPr>
+              <a:t>関係部署（防災対策課、道路管理担当課、上下水道局、福祉部門等）へのヒアリング</a:t>
+            </a:r>
+            <a:endParaRPr lang="en-US" sz="1150" dirty="0"/>
+          </a:p>
+          <a:p>
+            <a:pPr marL="203200" indent="-203200">
+              <a:spcAft>
+                <a:spcPts val="1000"/>
+              </a:spcAft>
+              <a:buSzPct val="100000"/>
+              <a:buChar char="▪"/>
+            </a:pPr>
+            <a:r>
+              <a:rPr lang="en-US" sz="1150" dirty="0">
+                <a:solidFill>
+                  <a:srgbClr val="CFE3ED"/>
+                </a:solidFill>
+                <a:latin typeface="Calibri" pitchFamily="34" charset="0"/>
+                <a:ea typeface="Calibri" pitchFamily="34" charset="-122"/>
+                <a:cs typeface="Calibri" pitchFamily="34" charset="-120"/>
+              </a:rPr>
+              <a:t>過去の豪雨対応時における課題・困りごとの洗い出し</a:t>
+            </a:r>
+            <a:endParaRPr lang="en-US" sz="1150" dirty="0"/>
+          </a:p>
+          <a:p>
+            <a:pPr marL="203200" indent="-203200">
+              <a:spcAft>
+                <a:spcPts val="1000"/>
+              </a:spcAft>
+              <a:buSzPct val="100000"/>
+              <a:buChar char="▪"/>
+            </a:pPr>
+            <a:r>
+              <a:rPr lang="en-US" sz="1150" dirty="0">
+                <a:solidFill>
+                  <a:srgbClr val="CFE3ED"/>
+                </a:solidFill>
+                <a:latin typeface="Calibri" pitchFamily="34" charset="0"/>
+                <a:ea typeface="Calibri" pitchFamily="34" charset="-122"/>
+                <a:cs typeface="Calibri" pitchFamily="34" charset="-120"/>
+              </a:rPr>
+              <a:t>現場職員の対応実態に関するアンケート調査</a:t>
+            </a:r>
+            <a:endParaRPr lang="en-US" sz="1150" dirty="0"/>
+          </a:p>
+        </p:txBody>
+      </p:sp>
+      <p:sp>
+        <p:nvSpPr>
+          <p:cNvPr id="14" name="Shape 12"/>
+          <p:cNvSpPr/>
+          <p:nvPr/>
+        </p:nvSpPr>
+        <p:spPr>
+          <a:xfrm>
+            <a:off x="8229600" y="1600200"/>
+            <a:ext cx="3611880" cy="4206240"/>
+          </a:xfrm>
+          <a:prstGeom prst="roundRect">
+            <a:avLst>
+              <a:gd name="adj" fmla="val 2025"/>
             </a:avLst>
           </a:prstGeom>
           <a:solidFill>
@@ -7121,14 +7888,34 @@
       </p:sp>
       <p:sp>
         <p:nvSpPr>
-          <p:cNvPr id="9" name="Text 7"/>
-          <p:cNvSpPr txBox="1"/>
-          <p:nvPr/>
-        </p:nvSpPr>
-        <p:spPr>
-          <a:xfrm>
-            <a:off x="914400" y="3657600"/>
-            <a:ext cx="2011680" cy="411480"/>
+          <p:cNvPr id="15" name="Shape 13"/>
+          <p:cNvSpPr/>
+          <p:nvPr/>
+        </p:nvSpPr>
+        <p:spPr>
+          <a:xfrm>
+            <a:off x="8503920" y="1874520"/>
+            <a:ext cx="548640" cy="548640"/>
+          </a:xfrm>
+          <a:prstGeom prst="ellipse">
+            <a:avLst/>
+          </a:prstGeom>
+          <a:solidFill>
+            <a:srgbClr val="065A82"/>
+          </a:solidFill>
+          <a:ln/>
+        </p:spPr>
+      </p:sp>
+      <p:sp>
+        <p:nvSpPr>
+          <p:cNvPr id="16" name="Text 14"/>
+          <p:cNvSpPr txBox="1"/>
+          <p:nvPr/>
+        </p:nvSpPr>
+        <p:spPr>
+          <a:xfrm>
+            <a:off x="8503920" y="1874520"/>
+            <a:ext cx="548640" cy="548640"/>
           </a:xfrm>
           <a:prstGeom prst="rect">
             <a:avLst/>
@@ -7144,111 +7931,30 @@
               <a:buNone/>
             </a:pPr>
             <a:r>
-              <a:rPr lang="en-US" sz="1450" b="1" dirty="0">
-                <a:solidFill>
-                  <a:srgbClr val="21295C"/>
+              <a:rPr lang="en-US" sz="2200" b="1" dirty="0">
+                <a:solidFill>
+                  <a:srgbClr val="FFFFFF"/>
                 </a:solidFill>
                 <a:latin typeface="Cambria" pitchFamily="34" charset="0"/>
                 <a:ea typeface="Cambria" pitchFamily="34" charset="-122"/>
                 <a:cs typeface="Cambria" pitchFamily="34" charset="-120"/>
               </a:rPr>
-              <a:t>リスク調査</a:t>
-            </a:r>
-            <a:endParaRPr lang="en-US" sz="1450" dirty="0"/>
-          </a:p>
-        </p:txBody>
-      </p:sp>
-      <p:sp>
-        <p:nvSpPr>
-          <p:cNvPr id="10" name="Text 8"/>
-          <p:cNvSpPr txBox="1"/>
-          <p:nvPr/>
-        </p:nvSpPr>
-        <p:spPr>
-          <a:xfrm>
-            <a:off x="914400" y="4114800"/>
-            <a:ext cx="2011680" cy="1051560"/>
-          </a:xfrm>
-          <a:prstGeom prst="rect">
-            <a:avLst/>
-          </a:prstGeom>
-          <a:noFill/>
-          <a:ln/>
-        </p:spPr>
-        <p:txBody>
-          <a:bodyPr wrap="square" lIns="0" tIns="0" rIns="0" bIns="0" rtlCol="0" anchor="t"/>
-          <a:lstStyle/>
-          <a:p>
-            <a:pPr algn="ctr" indent="0" marL="0">
-              <a:buNone/>
-            </a:pPr>
-            <a:r>
-              <a:rPr lang="en-US" sz="1100" dirty="0">
-                <a:solidFill>
-                  <a:srgbClr val="1E2430"/>
-                </a:solidFill>
-                <a:latin typeface="Calibri" pitchFamily="34" charset="0"/>
-                <a:ea typeface="Calibri" pitchFamily="34" charset="-122"/>
-                <a:cs typeface="Calibri" pitchFamily="34" charset="-120"/>
-              </a:rPr>
-              <a:t>内水氾濫リスクの再整理</a:t>
-            </a:r>
-            <a:endParaRPr lang="en-US" sz="1100" dirty="0"/>
-          </a:p>
-          <a:p>
-            <a:pPr algn="ctr" indent="0" marL="0">
-              <a:buNone/>
-            </a:pPr>
-            <a:r>
-              <a:rPr lang="en-US" sz="1100" dirty="0">
-                <a:solidFill>
-                  <a:srgbClr val="1E2430"/>
-                </a:solidFill>
-                <a:latin typeface="Calibri" pitchFamily="34" charset="0"/>
-                <a:ea typeface="Calibri" pitchFamily="34" charset="-122"/>
-                <a:cs typeface="Calibri" pitchFamily="34" charset="-120"/>
-              </a:rPr>
-              <a:t>優先確認箇所の洗い出し</a:t>
-            </a:r>
-            <a:endParaRPr lang="en-US" sz="1100" dirty="0"/>
-          </a:p>
-        </p:txBody>
-      </p:sp>
-      <p:sp>
-        <p:nvSpPr>
-          <p:cNvPr id="11" name="Shape 9"/>
-          <p:cNvSpPr/>
-          <p:nvPr/>
-        </p:nvSpPr>
-        <p:spPr>
-          <a:xfrm>
-            <a:off x="4419600" y="2423160"/>
-            <a:ext cx="548640" cy="548640"/>
-          </a:xfrm>
-          <a:prstGeom prst="ellipse">
-            <a:avLst/>
-          </a:prstGeom>
-          <a:solidFill>
-            <a:srgbClr val="065A82"/>
-          </a:solidFill>
-          <a:ln w="25400">
-            <a:solidFill>
-              <a:srgbClr val="FFFFFF"/>
-            </a:solidFill>
-            <a:prstDash val="solid"/>
-          </a:ln>
-        </p:spPr>
-      </p:sp>
-      <p:sp>
-        <p:nvSpPr>
-          <p:cNvPr id="12" name="Text 10"/>
-          <p:cNvSpPr txBox="1"/>
-          <p:nvPr/>
-        </p:nvSpPr>
-        <p:spPr>
-          <a:xfrm>
-            <a:off x="4419600" y="2423160"/>
-            <a:ext cx="548640" cy="548640"/>
+              <a:t>3</a:t>
+            </a:r>
+            <a:endParaRPr lang="en-US" sz="2200" dirty="0"/>
+          </a:p>
+        </p:txBody>
+      </p:sp>
+      <p:sp>
+        <p:nvSpPr>
+          <p:cNvPr id="17" name="Text 15"/>
+          <p:cNvSpPr txBox="1"/>
+          <p:nvPr/>
+        </p:nvSpPr>
+        <p:spPr>
+          <a:xfrm>
+            <a:off x="8503920" y="2560320"/>
+            <a:ext cx="3063240" cy="548640"/>
           </a:xfrm>
           <a:prstGeom prst="rect">
             <a:avLst/>
@@ -7260,134 +7966,34 @@
           <a:bodyPr wrap="square" lIns="0" tIns="0" rIns="0" bIns="0" rtlCol="0" anchor="ctr"/>
           <a:lstStyle/>
           <a:p>
-            <a:pPr algn="ctr" indent="0" marL="0">
-              <a:buNone/>
-            </a:pPr>
-            <a:r>
-              <a:rPr lang="en-US" sz="1800" b="1" dirty="0">
-                <a:solidFill>
-                  <a:srgbClr val="FFFFFF"/>
+            <a:pPr indent="0" marL="0">
+              <a:buNone/>
+            </a:pPr>
+            <a:r>
+              <a:rPr lang="en-US" sz="1700" b="1" dirty="0">
+                <a:solidFill>
+                  <a:srgbClr val="21295C"/>
                 </a:solidFill>
                 <a:latin typeface="Cambria" pitchFamily="34" charset="0"/>
                 <a:ea typeface="Cambria" pitchFamily="34" charset="-122"/>
                 <a:cs typeface="Cambria" pitchFamily="34" charset="-120"/>
               </a:rPr>
-              <a:t>2</a:t>
-            </a:r>
-            <a:endParaRPr lang="en-US" sz="1800" dirty="0"/>
-          </a:p>
-        </p:txBody>
-      </p:sp>
-      <p:sp>
-        <p:nvSpPr>
-          <p:cNvPr id="13" name="Text 11"/>
-          <p:cNvSpPr txBox="1"/>
-          <p:nvPr/>
-        </p:nvSpPr>
-        <p:spPr>
-          <a:xfrm>
-            <a:off x="3550920" y="3154680"/>
-            <a:ext cx="2286000" cy="320040"/>
-          </a:xfrm>
-          <a:prstGeom prst="rect">
-            <a:avLst/>
-          </a:prstGeom>
-          <a:noFill/>
-          <a:ln/>
-        </p:spPr>
-        <p:txBody>
-          <a:bodyPr wrap="square" lIns="0" tIns="0" rIns="0" bIns="0" rtlCol="0" anchor="ctr"/>
-          <a:lstStyle/>
-          <a:p>
-            <a:pPr algn="ctr" indent="0" marL="0">
-              <a:buNone/>
-            </a:pPr>
-            <a:r>
-              <a:rPr lang="en-US" sz="1200" b="1" dirty="0">
-                <a:solidFill>
-                  <a:srgbClr val="1C7293"/>
-                </a:solidFill>
-                <a:latin typeface="Calibri" pitchFamily="34" charset="0"/>
-                <a:ea typeface="Calibri" pitchFamily="34" charset="-122"/>
-                <a:cs typeface="Calibri" pitchFamily="34" charset="-120"/>
-              </a:rPr>
-              <a:t>第2四半期</a:t>
-            </a:r>
-            <a:endParaRPr lang="en-US" sz="1200" dirty="0"/>
-          </a:p>
-        </p:txBody>
-      </p:sp>
-      <p:sp>
-        <p:nvSpPr>
-          <p:cNvPr id="14" name="Shape 12"/>
-          <p:cNvSpPr/>
-          <p:nvPr/>
-        </p:nvSpPr>
-        <p:spPr>
-          <a:xfrm>
-            <a:off x="3550920" y="3520440"/>
-            <a:ext cx="2286000" cy="1737360"/>
-          </a:xfrm>
-          <a:prstGeom prst="roundRect">
-            <a:avLst>
-              <a:gd name="adj" fmla="val 4211"/>
-            </a:avLst>
-          </a:prstGeom>
-          <a:solidFill>
-            <a:srgbClr val="F4F8FA"/>
-          </a:solidFill>
-          <a:ln/>
-        </p:spPr>
-      </p:sp>
-      <p:sp>
-        <p:nvSpPr>
-          <p:cNvPr id="15" name="Text 13"/>
-          <p:cNvSpPr txBox="1"/>
-          <p:nvPr/>
-        </p:nvSpPr>
-        <p:spPr>
-          <a:xfrm>
-            <a:off x="3688080" y="3657600"/>
-            <a:ext cx="2011680" cy="411480"/>
-          </a:xfrm>
-          <a:prstGeom prst="rect">
-            <a:avLst/>
-          </a:prstGeom>
-          <a:noFill/>
-          <a:ln/>
-        </p:spPr>
-        <p:txBody>
-          <a:bodyPr wrap="square" lIns="0" tIns="0" rIns="0" bIns="0" rtlCol="0" anchor="ctr"/>
-          <a:lstStyle/>
-          <a:p>
-            <a:pPr algn="ctr" indent="0" marL="0">
-              <a:buNone/>
-            </a:pPr>
-            <a:r>
-              <a:rPr lang="en-US" sz="1450" b="1" dirty="0">
-                <a:solidFill>
-                  <a:srgbClr val="21295C"/>
-                </a:solidFill>
-                <a:latin typeface="Cambria" pitchFamily="34" charset="0"/>
-                <a:ea typeface="Cambria" pitchFamily="34" charset="-122"/>
-                <a:cs typeface="Cambria" pitchFamily="34" charset="-120"/>
-              </a:rPr>
-              <a:t>庁内サーベイ</a:t>
-            </a:r>
-            <a:endParaRPr lang="en-US" sz="1450" dirty="0"/>
-          </a:p>
-        </p:txBody>
-      </p:sp>
-      <p:sp>
-        <p:nvSpPr>
-          <p:cNvPr id="16" name="Text 14"/>
-          <p:cNvSpPr txBox="1"/>
-          <p:nvPr/>
-        </p:nvSpPr>
-        <p:spPr>
-          <a:xfrm>
-            <a:off x="3688080" y="4114800"/>
-            <a:ext cx="2011680" cy="1051560"/>
+              <a:t>対応マニュアルの作成</a:t>
+            </a:r>
+            <a:endParaRPr lang="en-US" sz="1700" dirty="0"/>
+          </a:p>
+        </p:txBody>
+      </p:sp>
+      <p:sp>
+        <p:nvSpPr>
+          <p:cNvPr id="18" name="Text 16"/>
+          <p:cNvSpPr txBox="1"/>
+          <p:nvPr/>
+        </p:nvSpPr>
+        <p:spPr>
+          <a:xfrm>
+            <a:off x="8503920" y="3200400"/>
+            <a:ext cx="3063240" cy="2377440"/>
           </a:xfrm>
           <a:prstGeom prst="rect">
             <a:avLst/>
@@ -7399,11 +8005,15 @@
           <a:bodyPr wrap="square" lIns="0" tIns="0" rIns="0" bIns="0" rtlCol="0" anchor="t"/>
           <a:lstStyle/>
           <a:p>
-            <a:pPr algn="ctr" indent="0" marL="0">
-              <a:buNone/>
-            </a:pPr>
-            <a:r>
-              <a:rPr lang="en-US" sz="1100" dirty="0">
+            <a:pPr marL="203200" indent="-203200">
+              <a:spcAft>
+                <a:spcPts val="1000"/>
+              </a:spcAft>
+              <a:buSzPct val="100000"/>
+              <a:buChar char="▪"/>
+            </a:pPr>
+            <a:r>
+              <a:rPr lang="en-US" sz="1150" dirty="0">
                 <a:solidFill>
                   <a:srgbClr val="1E2430"/>
                 </a:solidFill>
@@ -7411,16 +8021,20 @@
                 <a:ea typeface="Calibri" pitchFamily="34" charset="-122"/>
                 <a:cs typeface="Calibri" pitchFamily="34" charset="-120"/>
               </a:rPr>
-              <a:t>関係部署へのヒアリング</a:t>
-            </a:r>
-            <a:endParaRPr lang="en-US" sz="1100" dirty="0"/>
-          </a:p>
-          <a:p>
-            <a:pPr algn="ctr" indent="0" marL="0">
-              <a:buNone/>
-            </a:pPr>
-            <a:r>
-              <a:rPr lang="en-US" sz="1100" dirty="0">
+              <a:t>豪雨発生時の初動対応フロー（警戒レベル別）の整理</a:t>
+            </a:r>
+            <a:endParaRPr lang="en-US" sz="1150" dirty="0"/>
+          </a:p>
+          <a:p>
+            <a:pPr marL="203200" indent="-203200">
+              <a:spcAft>
+                <a:spcPts val="1000"/>
+              </a:spcAft>
+              <a:buSzPct val="100000"/>
+              <a:buChar char="▪"/>
+            </a:pPr>
+            <a:r>
+              <a:rPr lang="en-US" sz="1150" dirty="0">
                 <a:solidFill>
                   <a:srgbClr val="1E2430"/>
                 </a:solidFill>
@@ -7428,455 +8042,36 @@
                 <a:ea typeface="Calibri" pitchFamily="34" charset="-122"/>
                 <a:cs typeface="Calibri" pitchFamily="34" charset="-120"/>
               </a:rPr>
-              <a:t>アンケート実施</a:t>
-            </a:r>
-            <a:endParaRPr lang="en-US" sz="1100" dirty="0"/>
-          </a:p>
-        </p:txBody>
-      </p:sp>
-      <p:sp>
-        <p:nvSpPr>
-          <p:cNvPr id="17" name="Shape 15"/>
-          <p:cNvSpPr/>
-          <p:nvPr/>
-        </p:nvSpPr>
-        <p:spPr>
-          <a:xfrm>
-            <a:off x="7193280" y="2423160"/>
-            <a:ext cx="548640" cy="548640"/>
-          </a:xfrm>
-          <a:prstGeom prst="ellipse">
-            <a:avLst/>
-          </a:prstGeom>
-          <a:solidFill>
-            <a:srgbClr val="065A82"/>
-          </a:solidFill>
-          <a:ln w="25400">
-            <a:solidFill>
-              <a:srgbClr val="FFFFFF"/>
-            </a:solidFill>
-            <a:prstDash val="solid"/>
-          </a:ln>
-        </p:spPr>
-      </p:sp>
-      <p:sp>
-        <p:nvSpPr>
-          <p:cNvPr id="18" name="Text 16"/>
-          <p:cNvSpPr txBox="1"/>
-          <p:nvPr/>
-        </p:nvSpPr>
-        <p:spPr>
-          <a:xfrm>
-            <a:off x="7193280" y="2423160"/>
-            <a:ext cx="548640" cy="548640"/>
-          </a:xfrm>
-          <a:prstGeom prst="rect">
-            <a:avLst/>
-          </a:prstGeom>
-          <a:noFill/>
-          <a:ln/>
-        </p:spPr>
-        <p:txBody>
-          <a:bodyPr wrap="square" lIns="0" tIns="0" rIns="0" bIns="0" rtlCol="0" anchor="ctr"/>
-          <a:lstStyle/>
-          <a:p>
-            <a:pPr algn="ctr" indent="0" marL="0">
-              <a:buNone/>
-            </a:pPr>
-            <a:r>
-              <a:rPr lang="en-US" sz="1800" b="1" dirty="0">
-                <a:solidFill>
-                  <a:srgbClr val="FFFFFF"/>
-                </a:solidFill>
-                <a:latin typeface="Cambria" pitchFamily="34" charset="0"/>
-                <a:ea typeface="Cambria" pitchFamily="34" charset="-122"/>
-                <a:cs typeface="Cambria" pitchFamily="34" charset="-120"/>
-              </a:rPr>
-              <a:t>3</a:t>
-            </a:r>
-            <a:endParaRPr lang="en-US" sz="1800" dirty="0"/>
+              <a:t>参集基準・非常配備体制の明文化</a:t>
+            </a:r>
+            <a:endParaRPr lang="en-US" sz="1150" dirty="0"/>
+          </a:p>
+          <a:p>
+            <a:pPr marL="203200" indent="-203200">
+              <a:spcAft>
+                <a:spcPts val="1000"/>
+              </a:spcAft>
+              <a:buSzPct val="100000"/>
+              <a:buChar char="▪"/>
+            </a:pPr>
+            <a:r>
+              <a:rPr lang="en-US" sz="1150" dirty="0">
+                <a:solidFill>
+                  <a:srgbClr val="1E2430"/>
+                </a:solidFill>
+                <a:latin typeface="Calibri" pitchFamily="34" charset="0"/>
+                <a:ea typeface="Calibri" pitchFamily="34" charset="-122"/>
+                <a:cs typeface="Calibri" pitchFamily="34" charset="-120"/>
+              </a:rPr>
+              <a:t>部署別役割分担・情報共有ルートの明確化、試行運用を経て全庁展開</a:t>
+            </a:r>
+            <a:endParaRPr lang="en-US" sz="1150" dirty="0"/>
           </a:p>
         </p:txBody>
       </p:sp>
       <p:sp>
         <p:nvSpPr>
           <p:cNvPr id="19" name="Text 17"/>
-          <p:cNvSpPr txBox="1"/>
-          <p:nvPr/>
-        </p:nvSpPr>
-        <p:spPr>
-          <a:xfrm>
-            <a:off x="6324600" y="3154680"/>
-            <a:ext cx="2286000" cy="320040"/>
-          </a:xfrm>
-          <a:prstGeom prst="rect">
-            <a:avLst/>
-          </a:prstGeom>
-          <a:noFill/>
-          <a:ln/>
-        </p:spPr>
-        <p:txBody>
-          <a:bodyPr wrap="square" lIns="0" tIns="0" rIns="0" bIns="0" rtlCol="0" anchor="ctr"/>
-          <a:lstStyle/>
-          <a:p>
-            <a:pPr algn="ctr" indent="0" marL="0">
-              <a:buNone/>
-            </a:pPr>
-            <a:r>
-              <a:rPr lang="en-US" sz="1200" b="1" dirty="0">
-                <a:solidFill>
-                  <a:srgbClr val="1C7293"/>
-                </a:solidFill>
-                <a:latin typeface="Calibri" pitchFamily="34" charset="0"/>
-                <a:ea typeface="Calibri" pitchFamily="34" charset="-122"/>
-                <a:cs typeface="Calibri" pitchFamily="34" charset="-120"/>
-              </a:rPr>
-              <a:t>第3四半期</a:t>
-            </a:r>
-            <a:endParaRPr lang="en-US" sz="1200" dirty="0"/>
-          </a:p>
-        </p:txBody>
-      </p:sp>
-      <p:sp>
-        <p:nvSpPr>
-          <p:cNvPr id="20" name="Shape 18"/>
-          <p:cNvSpPr/>
-          <p:nvPr/>
-        </p:nvSpPr>
-        <p:spPr>
-          <a:xfrm>
-            <a:off x="6324600" y="3520440"/>
-            <a:ext cx="2286000" cy="1737360"/>
-          </a:xfrm>
-          <a:prstGeom prst="roundRect">
-            <a:avLst>
-              <a:gd name="adj" fmla="val 4211"/>
-            </a:avLst>
-          </a:prstGeom>
-          <a:solidFill>
-            <a:srgbClr val="F4F8FA"/>
-          </a:solidFill>
-          <a:ln/>
-        </p:spPr>
-      </p:sp>
-      <p:sp>
-        <p:nvSpPr>
-          <p:cNvPr id="21" name="Text 19"/>
-          <p:cNvSpPr txBox="1"/>
-          <p:nvPr/>
-        </p:nvSpPr>
-        <p:spPr>
-          <a:xfrm>
-            <a:off x="6461760" y="3657600"/>
-            <a:ext cx="2011680" cy="411480"/>
-          </a:xfrm>
-          <a:prstGeom prst="rect">
-            <a:avLst/>
-          </a:prstGeom>
-          <a:noFill/>
-          <a:ln/>
-        </p:spPr>
-        <p:txBody>
-          <a:bodyPr wrap="square" lIns="0" tIns="0" rIns="0" bIns="0" rtlCol="0" anchor="ctr"/>
-          <a:lstStyle/>
-          <a:p>
-            <a:pPr algn="ctr" indent="0" marL="0">
-              <a:buNone/>
-            </a:pPr>
-            <a:r>
-              <a:rPr lang="en-US" sz="1450" b="1" dirty="0">
-                <a:solidFill>
-                  <a:srgbClr val="21295C"/>
-                </a:solidFill>
-                <a:latin typeface="Cambria" pitchFamily="34" charset="0"/>
-                <a:ea typeface="Cambria" pitchFamily="34" charset="-122"/>
-                <a:cs typeface="Cambria" pitchFamily="34" charset="-120"/>
-              </a:rPr>
-              <a:t>マニュアル素案作成</a:t>
-            </a:r>
-            <a:endParaRPr lang="en-US" sz="1450" dirty="0"/>
-          </a:p>
-        </p:txBody>
-      </p:sp>
-      <p:sp>
-        <p:nvSpPr>
-          <p:cNvPr id="22" name="Text 20"/>
-          <p:cNvSpPr txBox="1"/>
-          <p:nvPr/>
-        </p:nvSpPr>
-        <p:spPr>
-          <a:xfrm>
-            <a:off x="6461760" y="4114800"/>
-            <a:ext cx="2011680" cy="1051560"/>
-          </a:xfrm>
-          <a:prstGeom prst="rect">
-            <a:avLst/>
-          </a:prstGeom>
-          <a:noFill/>
-          <a:ln/>
-        </p:spPr>
-        <p:txBody>
-          <a:bodyPr wrap="square" lIns="0" tIns="0" rIns="0" bIns="0" rtlCol="0" anchor="t"/>
-          <a:lstStyle/>
-          <a:p>
-            <a:pPr algn="ctr" indent="0" marL="0">
-              <a:buNone/>
-            </a:pPr>
-            <a:r>
-              <a:rPr lang="en-US" sz="1100" dirty="0">
-                <a:solidFill>
-                  <a:srgbClr val="1E2430"/>
-                </a:solidFill>
-                <a:latin typeface="Calibri" pitchFamily="34" charset="0"/>
-                <a:ea typeface="Calibri" pitchFamily="34" charset="-122"/>
-                <a:cs typeface="Calibri" pitchFamily="34" charset="-120"/>
-              </a:rPr>
-              <a:t>初動対応フロー・役割分担</a:t>
-            </a:r>
-            <a:endParaRPr lang="en-US" sz="1100" dirty="0"/>
-          </a:p>
-          <a:p>
-            <a:pPr algn="ctr" indent="0" marL="0">
-              <a:buNone/>
-            </a:pPr>
-            <a:r>
-              <a:rPr lang="en-US" sz="1100" dirty="0">
-                <a:solidFill>
-                  <a:srgbClr val="1E2430"/>
-                </a:solidFill>
-                <a:latin typeface="Calibri" pitchFamily="34" charset="0"/>
-                <a:ea typeface="Calibri" pitchFamily="34" charset="-122"/>
-                <a:cs typeface="Calibri" pitchFamily="34" charset="-120"/>
-              </a:rPr>
-              <a:t>参集基準の整理</a:t>
-            </a:r>
-            <a:endParaRPr lang="en-US" sz="1100" dirty="0"/>
-          </a:p>
-        </p:txBody>
-      </p:sp>
-      <p:sp>
-        <p:nvSpPr>
-          <p:cNvPr id="23" name="Shape 21"/>
-          <p:cNvSpPr/>
-          <p:nvPr/>
-        </p:nvSpPr>
-        <p:spPr>
-          <a:xfrm>
-            <a:off x="9966960" y="2423160"/>
-            <a:ext cx="548640" cy="548640"/>
-          </a:xfrm>
-          <a:prstGeom prst="ellipse">
-            <a:avLst/>
-          </a:prstGeom>
-          <a:solidFill>
-            <a:srgbClr val="065A82"/>
-          </a:solidFill>
-          <a:ln w="25400">
-            <a:solidFill>
-              <a:srgbClr val="FFFFFF"/>
-            </a:solidFill>
-            <a:prstDash val="solid"/>
-          </a:ln>
-        </p:spPr>
-      </p:sp>
-      <p:sp>
-        <p:nvSpPr>
-          <p:cNvPr id="24" name="Text 22"/>
-          <p:cNvSpPr txBox="1"/>
-          <p:nvPr/>
-        </p:nvSpPr>
-        <p:spPr>
-          <a:xfrm>
-            <a:off x="9966960" y="2423160"/>
-            <a:ext cx="548640" cy="548640"/>
-          </a:xfrm>
-          <a:prstGeom prst="rect">
-            <a:avLst/>
-          </a:prstGeom>
-          <a:noFill/>
-          <a:ln/>
-        </p:spPr>
-        <p:txBody>
-          <a:bodyPr wrap="square" lIns="0" tIns="0" rIns="0" bIns="0" rtlCol="0" anchor="ctr"/>
-          <a:lstStyle/>
-          <a:p>
-            <a:pPr algn="ctr" indent="0" marL="0">
-              <a:buNone/>
-            </a:pPr>
-            <a:r>
-              <a:rPr lang="en-US" sz="1800" b="1" dirty="0">
-                <a:solidFill>
-                  <a:srgbClr val="FFFFFF"/>
-                </a:solidFill>
-                <a:latin typeface="Cambria" pitchFamily="34" charset="0"/>
-                <a:ea typeface="Cambria" pitchFamily="34" charset="-122"/>
-                <a:cs typeface="Cambria" pitchFamily="34" charset="-120"/>
-              </a:rPr>
-              <a:t>4</a:t>
-            </a:r>
-            <a:endParaRPr lang="en-US" sz="1800" dirty="0"/>
-          </a:p>
-        </p:txBody>
-      </p:sp>
-      <p:sp>
-        <p:nvSpPr>
-          <p:cNvPr id="25" name="Text 23"/>
-          <p:cNvSpPr txBox="1"/>
-          <p:nvPr/>
-        </p:nvSpPr>
-        <p:spPr>
-          <a:xfrm>
-            <a:off x="9098280" y="3154680"/>
-            <a:ext cx="2286000" cy="320040"/>
-          </a:xfrm>
-          <a:prstGeom prst="rect">
-            <a:avLst/>
-          </a:prstGeom>
-          <a:noFill/>
-          <a:ln/>
-        </p:spPr>
-        <p:txBody>
-          <a:bodyPr wrap="square" lIns="0" tIns="0" rIns="0" bIns="0" rtlCol="0" anchor="ctr"/>
-          <a:lstStyle/>
-          <a:p>
-            <a:pPr algn="ctr" indent="0" marL="0">
-              <a:buNone/>
-            </a:pPr>
-            <a:r>
-              <a:rPr lang="en-US" sz="1200" b="1" dirty="0">
-                <a:solidFill>
-                  <a:srgbClr val="1C7293"/>
-                </a:solidFill>
-                <a:latin typeface="Calibri" pitchFamily="34" charset="0"/>
-                <a:ea typeface="Calibri" pitchFamily="34" charset="-122"/>
-                <a:cs typeface="Calibri" pitchFamily="34" charset="-120"/>
-              </a:rPr>
-              <a:t>第4四半期</a:t>
-            </a:r>
-            <a:endParaRPr lang="en-US" sz="1200" dirty="0"/>
-          </a:p>
-        </p:txBody>
-      </p:sp>
-      <p:sp>
-        <p:nvSpPr>
-          <p:cNvPr id="26" name="Shape 24"/>
-          <p:cNvSpPr/>
-          <p:nvPr/>
-        </p:nvSpPr>
-        <p:spPr>
-          <a:xfrm>
-            <a:off x="9098280" y="3520440"/>
-            <a:ext cx="2286000" cy="1737360"/>
-          </a:xfrm>
-          <a:prstGeom prst="roundRect">
-            <a:avLst>
-              <a:gd name="adj" fmla="val 4211"/>
-            </a:avLst>
-          </a:prstGeom>
-          <a:solidFill>
-            <a:srgbClr val="F4F8FA"/>
-          </a:solidFill>
-          <a:ln/>
-        </p:spPr>
-      </p:sp>
-      <p:sp>
-        <p:nvSpPr>
-          <p:cNvPr id="27" name="Text 25"/>
-          <p:cNvSpPr txBox="1"/>
-          <p:nvPr/>
-        </p:nvSpPr>
-        <p:spPr>
-          <a:xfrm>
-            <a:off x="9235440" y="3657600"/>
-            <a:ext cx="2011680" cy="411480"/>
-          </a:xfrm>
-          <a:prstGeom prst="rect">
-            <a:avLst/>
-          </a:prstGeom>
-          <a:noFill/>
-          <a:ln/>
-        </p:spPr>
-        <p:txBody>
-          <a:bodyPr wrap="square" lIns="0" tIns="0" rIns="0" bIns="0" rtlCol="0" anchor="ctr"/>
-          <a:lstStyle/>
-          <a:p>
-            <a:pPr algn="ctr" indent="0" marL="0">
-              <a:buNone/>
-            </a:pPr>
-            <a:r>
-              <a:rPr lang="en-US" sz="1450" b="1" dirty="0">
-                <a:solidFill>
-                  <a:srgbClr val="21295C"/>
-                </a:solidFill>
-                <a:latin typeface="Cambria" pitchFamily="34" charset="0"/>
-                <a:ea typeface="Cambria" pitchFamily="34" charset="-122"/>
-                <a:cs typeface="Cambria" pitchFamily="34" charset="-120"/>
-              </a:rPr>
-              <a:t>試行・確定</a:t>
-            </a:r>
-            <a:endParaRPr lang="en-US" sz="1450" dirty="0"/>
-          </a:p>
-        </p:txBody>
-      </p:sp>
-      <p:sp>
-        <p:nvSpPr>
-          <p:cNvPr id="28" name="Text 26"/>
-          <p:cNvSpPr txBox="1"/>
-          <p:nvPr/>
-        </p:nvSpPr>
-        <p:spPr>
-          <a:xfrm>
-            <a:off x="9235440" y="4114800"/>
-            <a:ext cx="2011680" cy="1051560"/>
-          </a:xfrm>
-          <a:prstGeom prst="rect">
-            <a:avLst/>
-          </a:prstGeom>
-          <a:noFill/>
-          <a:ln/>
-        </p:spPr>
-        <p:txBody>
-          <a:bodyPr wrap="square" lIns="0" tIns="0" rIns="0" bIns="0" rtlCol="0" anchor="t"/>
-          <a:lstStyle/>
-          <a:p>
-            <a:pPr algn="ctr" indent="0" marL="0">
-              <a:buNone/>
-            </a:pPr>
-            <a:r>
-              <a:rPr lang="en-US" sz="1100" dirty="0">
-                <a:solidFill>
-                  <a:srgbClr val="1E2430"/>
-                </a:solidFill>
-                <a:latin typeface="Calibri" pitchFamily="34" charset="0"/>
-                <a:ea typeface="Calibri" pitchFamily="34" charset="-122"/>
-                <a:cs typeface="Calibri" pitchFamily="34" charset="-120"/>
-              </a:rPr>
-              <a:t>訓練等での試行運用を経て</a:t>
-            </a:r>
-            <a:endParaRPr lang="en-US" sz="1100" dirty="0"/>
-          </a:p>
-          <a:p>
-            <a:pPr algn="ctr" indent="0" marL="0">
-              <a:buNone/>
-            </a:pPr>
-            <a:r>
-              <a:rPr lang="en-US" sz="1100" dirty="0">
-                <a:solidFill>
-                  <a:srgbClr val="1E2430"/>
-                </a:solidFill>
-                <a:latin typeface="Calibri" pitchFamily="34" charset="0"/>
-                <a:ea typeface="Calibri" pitchFamily="34" charset="-122"/>
-                <a:cs typeface="Calibri" pitchFamily="34" charset="-120"/>
-              </a:rPr>
-              <a:t>マニュアルを確定・全庁展開</a:t>
-            </a:r>
-            <a:endParaRPr lang="en-US" sz="1100" dirty="0"/>
-          </a:p>
-        </p:txBody>
-      </p:sp>
-      <p:sp>
-        <p:nvSpPr>
-          <p:cNvPr id="29" name="Text 27"/>
           <p:cNvSpPr txBox="1"/>
           <p:nvPr/>
         </p:nvSpPr>
@@ -7915,7 +8110,7 @@
       </p:sp>
       <p:sp>
         <p:nvSpPr>
-          <p:cNvPr id="30" name="Text 28"/>
+          <p:cNvPr id="20" name="Text 18"/>
           <p:cNvSpPr txBox="1"/>
           <p:nvPr/>
         </p:nvSpPr>
@@ -8017,7 +8212,7 @@
                 <a:ea typeface="Calibri" pitchFamily="34" charset="-122"/>
                 <a:cs typeface="Calibri" pitchFamily="34" charset="-120"/>
               </a:rPr>
-              <a:t>7｜実施体制・費用／期待される効果</a:t>
+              <a:t>7｜実施スケジュール（単年度事業）</a:t>
             </a:r>
             <a:endParaRPr lang="en-US" sz="1300" dirty="0"/>
           </a:p>
@@ -8056,7 +8251,7 @@
                 <a:ea typeface="Cambria" pitchFamily="34" charset="-122"/>
                 <a:cs typeface="Cambria" pitchFamily="34" charset="-120"/>
               </a:rPr>
-              <a:t>低コストで、組織的な対応力を底上げ</a:t>
+              <a:t>内製中心・4四半期での完結</a:t>
             </a:r>
             <a:endParaRPr lang="en-US" sz="2800" dirty="0"/>
           </a:p>
@@ -8070,12 +8265,138 @@
         </p:nvSpPr>
         <p:spPr>
           <a:xfrm>
-            <a:off x="548640" y="1600200"/>
-            <a:ext cx="5394960" cy="4114800"/>
+            <a:off x="1920240" y="2697480"/>
+            <a:ext cx="8321040" cy="0"/>
+          </a:xfrm>
+          <a:prstGeom prst="line">
+            <a:avLst/>
+          </a:prstGeom>
+          <a:noFill/>
+          <a:ln w="25400">
+            <a:solidFill>
+              <a:srgbClr val="1C7293"/>
+            </a:solidFill>
+            <a:prstDash val="solid"/>
+          </a:ln>
+        </p:spPr>
+      </p:sp>
+      <p:sp>
+        <p:nvSpPr>
+          <p:cNvPr id="5" name="Shape 3"/>
+          <p:cNvSpPr/>
+          <p:nvPr/>
+        </p:nvSpPr>
+        <p:spPr>
+          <a:xfrm>
+            <a:off x="1645920" y="2423160"/>
+            <a:ext cx="548640" cy="548640"/>
+          </a:xfrm>
+          <a:prstGeom prst="ellipse">
+            <a:avLst/>
+          </a:prstGeom>
+          <a:solidFill>
+            <a:srgbClr val="065A82"/>
+          </a:solidFill>
+          <a:ln w="25400">
+            <a:solidFill>
+              <a:srgbClr val="FFFFFF"/>
+            </a:solidFill>
+            <a:prstDash val="solid"/>
+          </a:ln>
+        </p:spPr>
+      </p:sp>
+      <p:sp>
+        <p:nvSpPr>
+          <p:cNvPr id="6" name="Text 4"/>
+          <p:cNvSpPr txBox="1"/>
+          <p:nvPr/>
+        </p:nvSpPr>
+        <p:spPr>
+          <a:xfrm>
+            <a:off x="1645920" y="2423160"/>
+            <a:ext cx="548640" cy="548640"/>
+          </a:xfrm>
+          <a:prstGeom prst="rect">
+            <a:avLst/>
+          </a:prstGeom>
+          <a:noFill/>
+          <a:ln/>
+        </p:spPr>
+        <p:txBody>
+          <a:bodyPr wrap="square" lIns="0" tIns="0" rIns="0" bIns="0" rtlCol="0" anchor="ctr"/>
+          <a:lstStyle/>
+          <a:p>
+            <a:pPr algn="ctr" indent="0" marL="0">
+              <a:buNone/>
+            </a:pPr>
+            <a:r>
+              <a:rPr lang="en-US" sz="1800" b="1" dirty="0">
+                <a:solidFill>
+                  <a:srgbClr val="FFFFFF"/>
+                </a:solidFill>
+                <a:latin typeface="Cambria" pitchFamily="34" charset="0"/>
+                <a:ea typeface="Cambria" pitchFamily="34" charset="-122"/>
+                <a:cs typeface="Cambria" pitchFamily="34" charset="-120"/>
+              </a:rPr>
+              <a:t>1</a:t>
+            </a:r>
+            <a:endParaRPr lang="en-US" sz="1800" dirty="0"/>
+          </a:p>
+        </p:txBody>
+      </p:sp>
+      <p:sp>
+        <p:nvSpPr>
+          <p:cNvPr id="7" name="Text 5"/>
+          <p:cNvSpPr txBox="1"/>
+          <p:nvPr/>
+        </p:nvSpPr>
+        <p:spPr>
+          <a:xfrm>
+            <a:off x="777240" y="3154680"/>
+            <a:ext cx="2286000" cy="320040"/>
+          </a:xfrm>
+          <a:prstGeom prst="rect">
+            <a:avLst/>
+          </a:prstGeom>
+          <a:noFill/>
+          <a:ln/>
+        </p:spPr>
+        <p:txBody>
+          <a:bodyPr wrap="square" lIns="0" tIns="0" rIns="0" bIns="0" rtlCol="0" anchor="ctr"/>
+          <a:lstStyle/>
+          <a:p>
+            <a:pPr algn="ctr" indent="0" marL="0">
+              <a:buNone/>
+            </a:pPr>
+            <a:r>
+              <a:rPr lang="en-US" sz="1200" b="1" dirty="0">
+                <a:solidFill>
+                  <a:srgbClr val="1C7293"/>
+                </a:solidFill>
+                <a:latin typeface="Calibri" pitchFamily="34" charset="0"/>
+                <a:ea typeface="Calibri" pitchFamily="34" charset="-122"/>
+                <a:cs typeface="Calibri" pitchFamily="34" charset="-120"/>
+              </a:rPr>
+              <a:t>第1四半期</a:t>
+            </a:r>
+            <a:endParaRPr lang="en-US" sz="1200" dirty="0"/>
+          </a:p>
+        </p:txBody>
+      </p:sp>
+      <p:sp>
+        <p:nvSpPr>
+          <p:cNvPr id="8" name="Shape 6"/>
+          <p:cNvSpPr/>
+          <p:nvPr/>
+        </p:nvSpPr>
+        <p:spPr>
+          <a:xfrm>
+            <a:off x="777240" y="3520440"/>
+            <a:ext cx="2286000" cy="1737360"/>
           </a:xfrm>
           <a:prstGeom prst="roundRect">
             <a:avLst>
-              <a:gd name="adj" fmla="val 2222"/>
+              <a:gd name="adj" fmla="val 4211"/>
             </a:avLst>
           </a:prstGeom>
           <a:solidFill>
@@ -8086,14 +8407,14 @@
       </p:sp>
       <p:sp>
         <p:nvSpPr>
-          <p:cNvPr id="5" name="Text 3"/>
-          <p:cNvSpPr txBox="1"/>
-          <p:nvPr/>
-        </p:nvSpPr>
-        <p:spPr>
-          <a:xfrm>
-            <a:off x="822960" y="1828800"/>
-            <a:ext cx="4846320" cy="365760"/>
+          <p:cNvPr id="9" name="Text 7"/>
+          <p:cNvSpPr txBox="1"/>
+          <p:nvPr/>
+        </p:nvSpPr>
+        <p:spPr>
+          <a:xfrm>
+            <a:off x="914400" y="3657600"/>
+            <a:ext cx="2011680" cy="411480"/>
           </a:xfrm>
           <a:prstGeom prst="rect">
             <a:avLst/>
@@ -8105,11 +8426,11 @@
           <a:bodyPr wrap="square" lIns="0" tIns="0" rIns="0" bIns="0" rtlCol="0" anchor="ctr"/>
           <a:lstStyle/>
           <a:p>
-            <a:pPr indent="0" marL="0">
-              <a:buNone/>
-            </a:pPr>
-            <a:r>
-              <a:rPr lang="en-US" sz="1600" b="1" dirty="0">
+            <a:pPr algn="ctr" indent="0" marL="0">
+              <a:buNone/>
+            </a:pPr>
+            <a:r>
+              <a:rPr lang="en-US" sz="1450" b="1" dirty="0">
                 <a:solidFill>
                   <a:srgbClr val="21295C"/>
                 </a:solidFill>
@@ -8117,22 +8438,22 @@
                 <a:ea typeface="Cambria" pitchFamily="34" charset="-122"/>
                 <a:cs typeface="Cambria" pitchFamily="34" charset="-120"/>
               </a:rPr>
-              <a:t>実施体制・費用</a:t>
-            </a:r>
-            <a:endParaRPr lang="en-US" sz="1600" dirty="0"/>
-          </a:p>
-        </p:txBody>
-      </p:sp>
-      <p:sp>
-        <p:nvSpPr>
-          <p:cNvPr id="6" name="Text 4"/>
-          <p:cNvSpPr txBox="1"/>
-          <p:nvPr/>
-        </p:nvSpPr>
-        <p:spPr>
-          <a:xfrm>
-            <a:off x="822960" y="2331720"/>
-            <a:ext cx="4846320" cy="3291840"/>
+              <a:t>リスク調査</a:t>
+            </a:r>
+            <a:endParaRPr lang="en-US" sz="1450" dirty="0"/>
+          </a:p>
+        </p:txBody>
+      </p:sp>
+      <p:sp>
+        <p:nvSpPr>
+          <p:cNvPr id="10" name="Text 8"/>
+          <p:cNvSpPr txBox="1"/>
+          <p:nvPr/>
+        </p:nvSpPr>
+        <p:spPr>
+          <a:xfrm>
+            <a:off x="914400" y="4114800"/>
+            <a:ext cx="2011680" cy="1051560"/>
           </a:xfrm>
           <a:prstGeom prst="rect">
             <a:avLst/>
@@ -8144,15 +8465,11 @@
           <a:bodyPr wrap="square" lIns="0" tIns="0" rIns="0" bIns="0" rtlCol="0" anchor="t"/>
           <a:lstStyle/>
           <a:p>
-            <a:pPr marL="228600" indent="-228600">
-              <a:spcAft>
-                <a:spcPts val="1200"/>
-              </a:spcAft>
-              <a:buSzPct val="100000"/>
-              <a:buChar char="▪"/>
-            </a:pPr>
-            <a:r>
-              <a:rPr lang="en-US" sz="1300" dirty="0">
+            <a:pPr algn="ctr" indent="0" marL="0">
+              <a:buNone/>
+            </a:pPr>
+            <a:r>
+              <a:rPr lang="en-US" sz="1100" dirty="0">
                 <a:solidFill>
                   <a:srgbClr val="1E2430"/>
                 </a:solidFill>
@@ -8160,20 +8477,16 @@
                 <a:ea typeface="Calibri" pitchFamily="34" charset="-122"/>
                 <a:cs typeface="Calibri" pitchFamily="34" charset="-120"/>
               </a:rPr>
-              <a:t>主管：地域活躍部 防災対策課</a:t>
-            </a:r>
-            <a:endParaRPr lang="en-US" sz="1300" dirty="0"/>
-          </a:p>
-          <a:p>
-            <a:pPr marL="228600" indent="-228600">
-              <a:spcAft>
-                <a:spcPts val="1200"/>
-              </a:spcAft>
-              <a:buSzPct val="100000"/>
-              <a:buChar char="▪"/>
-            </a:pPr>
-            <a:r>
-              <a:rPr lang="en-US" sz="1300" dirty="0">
+              <a:t>内水氾濫リスクの再整理</a:t>
+            </a:r>
+            <a:endParaRPr lang="en-US" sz="1100" dirty="0"/>
+          </a:p>
+          <a:p>
+            <a:pPr algn="ctr" indent="0" marL="0">
+              <a:buNone/>
+            </a:pPr>
+            <a:r>
+              <a:rPr lang="en-US" sz="1100" dirty="0">
                 <a:solidFill>
                   <a:srgbClr val="1E2430"/>
                 </a:solidFill>
@@ -8181,86 +8494,47 @@
                 <a:ea typeface="Calibri" pitchFamily="34" charset="-122"/>
                 <a:cs typeface="Calibri" pitchFamily="34" charset="-120"/>
               </a:rPr>
-              <a:t>関係部署（道路管理担当課、上下水道局、福祉部門等）と連携し、内製で実施することを基本とする</a:t>
-            </a:r>
-            <a:endParaRPr lang="en-US" sz="1300" dirty="0"/>
-          </a:p>
-          <a:p>
-            <a:pPr marL="228600" indent="-228600">
-              <a:spcAft>
-                <a:spcPts val="1200"/>
-              </a:spcAft>
-              <a:buSzPct val="100000"/>
-              <a:buChar char="▪"/>
-            </a:pPr>
-            <a:r>
-              <a:rPr lang="en-US" sz="1300" dirty="0">
-                <a:solidFill>
-                  <a:srgbClr val="1E2430"/>
-                </a:solidFill>
-                <a:latin typeface="Calibri" pitchFamily="34" charset="0"/>
-                <a:ea typeface="Calibri" pitchFamily="34" charset="-122"/>
-                <a:cs typeface="Calibri" pitchFamily="34" charset="-120"/>
-              </a:rPr>
-              <a:t>外部委託が必要な範囲（専門的な浸水解析等）は最小限にとどめ、既存の統計データ・庁内知見を最大限活用</a:t>
-            </a:r>
-            <a:endParaRPr lang="en-US" sz="1300" dirty="0"/>
-          </a:p>
-          <a:p>
-            <a:pPr marL="228600" indent="-228600">
-              <a:spcAft>
-                <a:spcPts val="1200"/>
-              </a:spcAft>
-              <a:buSzPct val="100000"/>
-              <a:buChar char="▪"/>
-            </a:pPr>
-            <a:r>
-              <a:rPr lang="en-US" sz="1300" dirty="0">
-                <a:solidFill>
-                  <a:srgbClr val="1E2430"/>
-                </a:solidFill>
-                <a:latin typeface="Calibri" pitchFamily="34" charset="0"/>
-                <a:ea typeface="Calibri" pitchFamily="34" charset="-122"/>
-                <a:cs typeface="Calibri" pitchFamily="34" charset="-120"/>
-              </a:rPr>
-              <a:t>必要に応じて国の防災・安全交付金等の活用可能性を別途検討</a:t>
-            </a:r>
-            <a:endParaRPr lang="en-US" sz="1300" dirty="0"/>
-          </a:p>
-        </p:txBody>
-      </p:sp>
-      <p:sp>
-        <p:nvSpPr>
-          <p:cNvPr id="7" name="Shape 5"/>
+              <a:t>優先確認箇所の洗い出し</a:t>
+            </a:r>
+            <a:endParaRPr lang="en-US" sz="1100" dirty="0"/>
+          </a:p>
+        </p:txBody>
+      </p:sp>
+      <p:sp>
+        <p:nvSpPr>
+          <p:cNvPr id="11" name="Shape 9"/>
           <p:cNvSpPr/>
           <p:nvPr/>
         </p:nvSpPr>
         <p:spPr>
           <a:xfrm>
-            <a:off x="6263640" y="1600200"/>
-            <a:ext cx="5394960" cy="4114800"/>
-          </a:xfrm>
-          <a:prstGeom prst="roundRect">
-            <a:avLst>
-              <a:gd name="adj" fmla="val 2222"/>
-            </a:avLst>
+            <a:off x="4419600" y="2423160"/>
+            <a:ext cx="548640" cy="548640"/>
+          </a:xfrm>
+          <a:prstGeom prst="ellipse">
+            <a:avLst/>
           </a:prstGeom>
           <a:solidFill>
             <a:srgbClr val="065A82"/>
           </a:solidFill>
-          <a:ln/>
-        </p:spPr>
-      </p:sp>
-      <p:sp>
-        <p:nvSpPr>
-          <p:cNvPr id="8" name="Text 6"/>
-          <p:cNvSpPr txBox="1"/>
-          <p:nvPr/>
-        </p:nvSpPr>
-        <p:spPr>
-          <a:xfrm>
-            <a:off x="6537960" y="1828800"/>
-            <a:ext cx="4846320" cy="365760"/>
+          <a:ln w="25400">
+            <a:solidFill>
+              <a:srgbClr val="FFFFFF"/>
+            </a:solidFill>
+            <a:prstDash val="solid"/>
+          </a:ln>
+        </p:spPr>
+      </p:sp>
+      <p:sp>
+        <p:nvSpPr>
+          <p:cNvPr id="12" name="Text 10"/>
+          <p:cNvSpPr txBox="1"/>
+          <p:nvPr/>
+        </p:nvSpPr>
+        <p:spPr>
+          <a:xfrm>
+            <a:off x="4419600" y="2423160"/>
+            <a:ext cx="548640" cy="548640"/>
           </a:xfrm>
           <a:prstGeom prst="rect">
             <a:avLst/>
@@ -8272,11 +8546,11 @@
           <a:bodyPr wrap="square" lIns="0" tIns="0" rIns="0" bIns="0" rtlCol="0" anchor="ctr"/>
           <a:lstStyle/>
           <a:p>
-            <a:pPr indent="0" marL="0">
-              <a:buNone/>
-            </a:pPr>
-            <a:r>
-              <a:rPr lang="en-US" sz="1600" b="1" dirty="0">
+            <a:pPr algn="ctr" indent="0" marL="0">
+              <a:buNone/>
+            </a:pPr>
+            <a:r>
+              <a:rPr lang="en-US" sz="1800" b="1" dirty="0">
                 <a:solidFill>
                   <a:srgbClr val="FFFFFF"/>
                 </a:solidFill>
@@ -8284,22 +8558,122 @@
                 <a:ea typeface="Cambria" pitchFamily="34" charset="-122"/>
                 <a:cs typeface="Cambria" pitchFamily="34" charset="-120"/>
               </a:rPr>
-              <a:t>期待される効果</a:t>
-            </a:r>
-            <a:endParaRPr lang="en-US" sz="1600" dirty="0"/>
-          </a:p>
-        </p:txBody>
-      </p:sp>
-      <p:sp>
-        <p:nvSpPr>
-          <p:cNvPr id="9" name="Text 7"/>
-          <p:cNvSpPr txBox="1"/>
-          <p:nvPr/>
-        </p:nvSpPr>
-        <p:spPr>
-          <a:xfrm>
-            <a:off x="6537960" y="2331720"/>
-            <a:ext cx="4846320" cy="3291840"/>
+              <a:t>2</a:t>
+            </a:r>
+            <a:endParaRPr lang="en-US" sz="1800" dirty="0"/>
+          </a:p>
+        </p:txBody>
+      </p:sp>
+      <p:sp>
+        <p:nvSpPr>
+          <p:cNvPr id="13" name="Text 11"/>
+          <p:cNvSpPr txBox="1"/>
+          <p:nvPr/>
+        </p:nvSpPr>
+        <p:spPr>
+          <a:xfrm>
+            <a:off x="3550920" y="3154680"/>
+            <a:ext cx="2286000" cy="320040"/>
+          </a:xfrm>
+          <a:prstGeom prst="rect">
+            <a:avLst/>
+          </a:prstGeom>
+          <a:noFill/>
+          <a:ln/>
+        </p:spPr>
+        <p:txBody>
+          <a:bodyPr wrap="square" lIns="0" tIns="0" rIns="0" bIns="0" rtlCol="0" anchor="ctr"/>
+          <a:lstStyle/>
+          <a:p>
+            <a:pPr algn="ctr" indent="0" marL="0">
+              <a:buNone/>
+            </a:pPr>
+            <a:r>
+              <a:rPr lang="en-US" sz="1200" b="1" dirty="0">
+                <a:solidFill>
+                  <a:srgbClr val="1C7293"/>
+                </a:solidFill>
+                <a:latin typeface="Calibri" pitchFamily="34" charset="0"/>
+                <a:ea typeface="Calibri" pitchFamily="34" charset="-122"/>
+                <a:cs typeface="Calibri" pitchFamily="34" charset="-120"/>
+              </a:rPr>
+              <a:t>第2四半期</a:t>
+            </a:r>
+            <a:endParaRPr lang="en-US" sz="1200" dirty="0"/>
+          </a:p>
+        </p:txBody>
+      </p:sp>
+      <p:sp>
+        <p:nvSpPr>
+          <p:cNvPr id="14" name="Shape 12"/>
+          <p:cNvSpPr/>
+          <p:nvPr/>
+        </p:nvSpPr>
+        <p:spPr>
+          <a:xfrm>
+            <a:off x="3550920" y="3520440"/>
+            <a:ext cx="2286000" cy="1737360"/>
+          </a:xfrm>
+          <a:prstGeom prst="roundRect">
+            <a:avLst>
+              <a:gd name="adj" fmla="val 4211"/>
+            </a:avLst>
+          </a:prstGeom>
+          <a:solidFill>
+            <a:srgbClr val="F4F8FA"/>
+          </a:solidFill>
+          <a:ln/>
+        </p:spPr>
+      </p:sp>
+      <p:sp>
+        <p:nvSpPr>
+          <p:cNvPr id="15" name="Text 13"/>
+          <p:cNvSpPr txBox="1"/>
+          <p:nvPr/>
+        </p:nvSpPr>
+        <p:spPr>
+          <a:xfrm>
+            <a:off x="3688080" y="3657600"/>
+            <a:ext cx="2011680" cy="411480"/>
+          </a:xfrm>
+          <a:prstGeom prst="rect">
+            <a:avLst/>
+          </a:prstGeom>
+          <a:noFill/>
+          <a:ln/>
+        </p:spPr>
+        <p:txBody>
+          <a:bodyPr wrap="square" lIns="0" tIns="0" rIns="0" bIns="0" rtlCol="0" anchor="ctr"/>
+          <a:lstStyle/>
+          <a:p>
+            <a:pPr algn="ctr" indent="0" marL="0">
+              <a:buNone/>
+            </a:pPr>
+            <a:r>
+              <a:rPr lang="en-US" sz="1450" b="1" dirty="0">
+                <a:solidFill>
+                  <a:srgbClr val="21295C"/>
+                </a:solidFill>
+                <a:latin typeface="Cambria" pitchFamily="34" charset="0"/>
+                <a:ea typeface="Cambria" pitchFamily="34" charset="-122"/>
+                <a:cs typeface="Cambria" pitchFamily="34" charset="-120"/>
+              </a:rPr>
+              <a:t>庁内サーベイ</a:t>
+            </a:r>
+            <a:endParaRPr lang="en-US" sz="1450" dirty="0"/>
+          </a:p>
+        </p:txBody>
+      </p:sp>
+      <p:sp>
+        <p:nvSpPr>
+          <p:cNvPr id="16" name="Text 14"/>
+          <p:cNvSpPr txBox="1"/>
+          <p:nvPr/>
+        </p:nvSpPr>
+        <p:spPr>
+          <a:xfrm>
+            <a:off x="3688080" y="4114800"/>
+            <a:ext cx="2011680" cy="1051560"/>
           </a:xfrm>
           <a:prstGeom prst="rect">
             <a:avLst/>
@@ -8311,94 +8685,484 @@
           <a:bodyPr wrap="square" lIns="0" tIns="0" rIns="0" bIns="0" rtlCol="0" anchor="t"/>
           <a:lstStyle/>
           <a:p>
-            <a:pPr marL="228600" indent="-228600">
-              <a:spcAft>
-                <a:spcPts val="1200"/>
-              </a:spcAft>
-              <a:buSzPct val="100000"/>
-              <a:buChar char="▪"/>
-            </a:pPr>
-            <a:r>
-              <a:rPr lang="en-US" sz="1300" dirty="0">
-                <a:solidFill>
-                  <a:srgbClr val="CFE3ED"/>
-                </a:solidFill>
-                <a:latin typeface="Calibri" pitchFamily="34" charset="0"/>
-                <a:ea typeface="Calibri" pitchFamily="34" charset="-122"/>
-                <a:cs typeface="Calibri" pitchFamily="34" charset="-120"/>
-              </a:rPr>
-              <a:t>豪雨発生時における初動対応の迅速化・的確化</a:t>
-            </a:r>
-            <a:endParaRPr lang="en-US" sz="1300" dirty="0"/>
-          </a:p>
-          <a:p>
-            <a:pPr marL="228600" indent="-228600">
-              <a:spcAft>
-                <a:spcPts val="1200"/>
-              </a:spcAft>
-              <a:buSzPct val="100000"/>
-              <a:buChar char="▪"/>
-            </a:pPr>
-            <a:r>
-              <a:rPr lang="en-US" sz="1300" dirty="0">
-                <a:solidFill>
-                  <a:srgbClr val="CFE3ED"/>
-                </a:solidFill>
-                <a:latin typeface="Calibri" pitchFamily="34" charset="0"/>
-                <a:ea typeface="Calibri" pitchFamily="34" charset="-122"/>
-                <a:cs typeface="Calibri" pitchFamily="34" charset="-120"/>
-              </a:rPr>
-              <a:t>対応の属人化解消による組織的なリスク管理体制の構築</a:t>
-            </a:r>
-            <a:endParaRPr lang="en-US" sz="1300" dirty="0"/>
-          </a:p>
-          <a:p>
-            <a:pPr marL="228600" indent="-228600">
-              <a:spcAft>
-                <a:spcPts val="1200"/>
-              </a:spcAft>
-              <a:buSzPct val="100000"/>
-              <a:buChar char="▪"/>
-            </a:pPr>
-            <a:r>
-              <a:rPr lang="en-US" sz="1300" dirty="0">
-                <a:solidFill>
-                  <a:srgbClr val="CFE3ED"/>
-                </a:solidFill>
-                <a:latin typeface="Calibri" pitchFamily="34" charset="0"/>
-                <a:ea typeface="Calibri" pitchFamily="34" charset="-122"/>
-                <a:cs typeface="Calibri" pitchFamily="34" charset="-120"/>
-              </a:rPr>
-              <a:t>部署間の情報共有の円滑化による意思決定の迅速化</a:t>
-            </a:r>
-            <a:endParaRPr lang="en-US" sz="1300" dirty="0"/>
-          </a:p>
-          <a:p>
-            <a:pPr marL="228600" indent="-228600">
-              <a:spcAft>
-                <a:spcPts val="1200"/>
-              </a:spcAft>
-              <a:buSzPct val="100000"/>
-              <a:buChar char="▪"/>
-            </a:pPr>
-            <a:r>
-              <a:rPr lang="en-US" sz="1300" dirty="0">
-                <a:solidFill>
-                  <a:srgbClr val="CFE3ED"/>
-                </a:solidFill>
-                <a:latin typeface="Calibri" pitchFamily="34" charset="0"/>
-                <a:ea typeface="Calibri" pitchFamily="34" charset="-122"/>
-                <a:cs typeface="Calibri" pitchFamily="34" charset="-120"/>
-              </a:rPr>
-              <a:t>住民への情報提供・避難対応等の質の向上</a:t>
-            </a:r>
-            <a:endParaRPr lang="en-US" sz="1300" dirty="0"/>
-          </a:p>
-        </p:txBody>
-      </p:sp>
-      <p:sp>
-        <p:nvSpPr>
-          <p:cNvPr id="10" name="Text 8"/>
+            <a:pPr algn="ctr" indent="0" marL="0">
+              <a:buNone/>
+            </a:pPr>
+            <a:r>
+              <a:rPr lang="en-US" sz="1100" dirty="0">
+                <a:solidFill>
+                  <a:srgbClr val="1E2430"/>
+                </a:solidFill>
+                <a:latin typeface="Calibri" pitchFamily="34" charset="0"/>
+                <a:ea typeface="Calibri" pitchFamily="34" charset="-122"/>
+                <a:cs typeface="Calibri" pitchFamily="34" charset="-120"/>
+              </a:rPr>
+              <a:t>関係部署へのヒアリング</a:t>
+            </a:r>
+            <a:endParaRPr lang="en-US" sz="1100" dirty="0"/>
+          </a:p>
+          <a:p>
+            <a:pPr algn="ctr" indent="0" marL="0">
+              <a:buNone/>
+            </a:pPr>
+            <a:r>
+              <a:rPr lang="en-US" sz="1100" dirty="0">
+                <a:solidFill>
+                  <a:srgbClr val="1E2430"/>
+                </a:solidFill>
+                <a:latin typeface="Calibri" pitchFamily="34" charset="0"/>
+                <a:ea typeface="Calibri" pitchFamily="34" charset="-122"/>
+                <a:cs typeface="Calibri" pitchFamily="34" charset="-120"/>
+              </a:rPr>
+              <a:t>アンケート実施</a:t>
+            </a:r>
+            <a:endParaRPr lang="en-US" sz="1100" dirty="0"/>
+          </a:p>
+        </p:txBody>
+      </p:sp>
+      <p:sp>
+        <p:nvSpPr>
+          <p:cNvPr id="17" name="Shape 15"/>
+          <p:cNvSpPr/>
+          <p:nvPr/>
+        </p:nvSpPr>
+        <p:spPr>
+          <a:xfrm>
+            <a:off x="7193280" y="2423160"/>
+            <a:ext cx="548640" cy="548640"/>
+          </a:xfrm>
+          <a:prstGeom prst="ellipse">
+            <a:avLst/>
+          </a:prstGeom>
+          <a:solidFill>
+            <a:srgbClr val="065A82"/>
+          </a:solidFill>
+          <a:ln w="25400">
+            <a:solidFill>
+              <a:srgbClr val="FFFFFF"/>
+            </a:solidFill>
+            <a:prstDash val="solid"/>
+          </a:ln>
+        </p:spPr>
+      </p:sp>
+      <p:sp>
+        <p:nvSpPr>
+          <p:cNvPr id="18" name="Text 16"/>
+          <p:cNvSpPr txBox="1"/>
+          <p:nvPr/>
+        </p:nvSpPr>
+        <p:spPr>
+          <a:xfrm>
+            <a:off x="7193280" y="2423160"/>
+            <a:ext cx="548640" cy="548640"/>
+          </a:xfrm>
+          <a:prstGeom prst="rect">
+            <a:avLst/>
+          </a:prstGeom>
+          <a:noFill/>
+          <a:ln/>
+        </p:spPr>
+        <p:txBody>
+          <a:bodyPr wrap="square" lIns="0" tIns="0" rIns="0" bIns="0" rtlCol="0" anchor="ctr"/>
+          <a:lstStyle/>
+          <a:p>
+            <a:pPr algn="ctr" indent="0" marL="0">
+              <a:buNone/>
+            </a:pPr>
+            <a:r>
+              <a:rPr lang="en-US" sz="1800" b="1" dirty="0">
+                <a:solidFill>
+                  <a:srgbClr val="FFFFFF"/>
+                </a:solidFill>
+                <a:latin typeface="Cambria" pitchFamily="34" charset="0"/>
+                <a:ea typeface="Cambria" pitchFamily="34" charset="-122"/>
+                <a:cs typeface="Cambria" pitchFamily="34" charset="-120"/>
+              </a:rPr>
+              <a:t>3</a:t>
+            </a:r>
+            <a:endParaRPr lang="en-US" sz="1800" dirty="0"/>
+          </a:p>
+        </p:txBody>
+      </p:sp>
+      <p:sp>
+        <p:nvSpPr>
+          <p:cNvPr id="19" name="Text 17"/>
+          <p:cNvSpPr txBox="1"/>
+          <p:nvPr/>
+        </p:nvSpPr>
+        <p:spPr>
+          <a:xfrm>
+            <a:off x="6324600" y="3154680"/>
+            <a:ext cx="2286000" cy="320040"/>
+          </a:xfrm>
+          <a:prstGeom prst="rect">
+            <a:avLst/>
+          </a:prstGeom>
+          <a:noFill/>
+          <a:ln/>
+        </p:spPr>
+        <p:txBody>
+          <a:bodyPr wrap="square" lIns="0" tIns="0" rIns="0" bIns="0" rtlCol="0" anchor="ctr"/>
+          <a:lstStyle/>
+          <a:p>
+            <a:pPr algn="ctr" indent="0" marL="0">
+              <a:buNone/>
+            </a:pPr>
+            <a:r>
+              <a:rPr lang="en-US" sz="1200" b="1" dirty="0">
+                <a:solidFill>
+                  <a:srgbClr val="1C7293"/>
+                </a:solidFill>
+                <a:latin typeface="Calibri" pitchFamily="34" charset="0"/>
+                <a:ea typeface="Calibri" pitchFamily="34" charset="-122"/>
+                <a:cs typeface="Calibri" pitchFamily="34" charset="-120"/>
+              </a:rPr>
+              <a:t>第3四半期</a:t>
+            </a:r>
+            <a:endParaRPr lang="en-US" sz="1200" dirty="0"/>
+          </a:p>
+        </p:txBody>
+      </p:sp>
+      <p:sp>
+        <p:nvSpPr>
+          <p:cNvPr id="20" name="Shape 18"/>
+          <p:cNvSpPr/>
+          <p:nvPr/>
+        </p:nvSpPr>
+        <p:spPr>
+          <a:xfrm>
+            <a:off x="6324600" y="3520440"/>
+            <a:ext cx="2286000" cy="1737360"/>
+          </a:xfrm>
+          <a:prstGeom prst="roundRect">
+            <a:avLst>
+              <a:gd name="adj" fmla="val 4211"/>
+            </a:avLst>
+          </a:prstGeom>
+          <a:solidFill>
+            <a:srgbClr val="F4F8FA"/>
+          </a:solidFill>
+          <a:ln/>
+        </p:spPr>
+      </p:sp>
+      <p:sp>
+        <p:nvSpPr>
+          <p:cNvPr id="21" name="Text 19"/>
+          <p:cNvSpPr txBox="1"/>
+          <p:nvPr/>
+        </p:nvSpPr>
+        <p:spPr>
+          <a:xfrm>
+            <a:off x="6461760" y="3657600"/>
+            <a:ext cx="2011680" cy="411480"/>
+          </a:xfrm>
+          <a:prstGeom prst="rect">
+            <a:avLst/>
+          </a:prstGeom>
+          <a:noFill/>
+          <a:ln/>
+        </p:spPr>
+        <p:txBody>
+          <a:bodyPr wrap="square" lIns="0" tIns="0" rIns="0" bIns="0" rtlCol="0" anchor="ctr"/>
+          <a:lstStyle/>
+          <a:p>
+            <a:pPr algn="ctr" indent="0" marL="0">
+              <a:buNone/>
+            </a:pPr>
+            <a:r>
+              <a:rPr lang="en-US" sz="1450" b="1" dirty="0">
+                <a:solidFill>
+                  <a:srgbClr val="21295C"/>
+                </a:solidFill>
+                <a:latin typeface="Cambria" pitchFamily="34" charset="0"/>
+                <a:ea typeface="Cambria" pitchFamily="34" charset="-122"/>
+                <a:cs typeface="Cambria" pitchFamily="34" charset="-120"/>
+              </a:rPr>
+              <a:t>マニュアル素案作成</a:t>
+            </a:r>
+            <a:endParaRPr lang="en-US" sz="1450" dirty="0"/>
+          </a:p>
+        </p:txBody>
+      </p:sp>
+      <p:sp>
+        <p:nvSpPr>
+          <p:cNvPr id="22" name="Text 20"/>
+          <p:cNvSpPr txBox="1"/>
+          <p:nvPr/>
+        </p:nvSpPr>
+        <p:spPr>
+          <a:xfrm>
+            <a:off x="6461760" y="4114800"/>
+            <a:ext cx="2011680" cy="1051560"/>
+          </a:xfrm>
+          <a:prstGeom prst="rect">
+            <a:avLst/>
+          </a:prstGeom>
+          <a:noFill/>
+          <a:ln/>
+        </p:spPr>
+        <p:txBody>
+          <a:bodyPr wrap="square" lIns="0" tIns="0" rIns="0" bIns="0" rtlCol="0" anchor="t"/>
+          <a:lstStyle/>
+          <a:p>
+            <a:pPr algn="ctr" indent="0" marL="0">
+              <a:buNone/>
+            </a:pPr>
+            <a:r>
+              <a:rPr lang="en-US" sz="1100" dirty="0">
+                <a:solidFill>
+                  <a:srgbClr val="1E2430"/>
+                </a:solidFill>
+                <a:latin typeface="Calibri" pitchFamily="34" charset="0"/>
+                <a:ea typeface="Calibri" pitchFamily="34" charset="-122"/>
+                <a:cs typeface="Calibri" pitchFamily="34" charset="-120"/>
+              </a:rPr>
+              <a:t>初動対応フロー・役割分担</a:t>
+            </a:r>
+            <a:endParaRPr lang="en-US" sz="1100" dirty="0"/>
+          </a:p>
+          <a:p>
+            <a:pPr algn="ctr" indent="0" marL="0">
+              <a:buNone/>
+            </a:pPr>
+            <a:r>
+              <a:rPr lang="en-US" sz="1100" dirty="0">
+                <a:solidFill>
+                  <a:srgbClr val="1E2430"/>
+                </a:solidFill>
+                <a:latin typeface="Calibri" pitchFamily="34" charset="0"/>
+                <a:ea typeface="Calibri" pitchFamily="34" charset="-122"/>
+                <a:cs typeface="Calibri" pitchFamily="34" charset="-120"/>
+              </a:rPr>
+              <a:t>参集基準の整理</a:t>
+            </a:r>
+            <a:endParaRPr lang="en-US" sz="1100" dirty="0"/>
+          </a:p>
+        </p:txBody>
+      </p:sp>
+      <p:sp>
+        <p:nvSpPr>
+          <p:cNvPr id="23" name="Shape 21"/>
+          <p:cNvSpPr/>
+          <p:nvPr/>
+        </p:nvSpPr>
+        <p:spPr>
+          <a:xfrm>
+            <a:off x="9966960" y="2423160"/>
+            <a:ext cx="548640" cy="548640"/>
+          </a:xfrm>
+          <a:prstGeom prst="ellipse">
+            <a:avLst/>
+          </a:prstGeom>
+          <a:solidFill>
+            <a:srgbClr val="065A82"/>
+          </a:solidFill>
+          <a:ln w="25400">
+            <a:solidFill>
+              <a:srgbClr val="FFFFFF"/>
+            </a:solidFill>
+            <a:prstDash val="solid"/>
+          </a:ln>
+        </p:spPr>
+      </p:sp>
+      <p:sp>
+        <p:nvSpPr>
+          <p:cNvPr id="24" name="Text 22"/>
+          <p:cNvSpPr txBox="1"/>
+          <p:nvPr/>
+        </p:nvSpPr>
+        <p:spPr>
+          <a:xfrm>
+            <a:off x="9966960" y="2423160"/>
+            <a:ext cx="548640" cy="548640"/>
+          </a:xfrm>
+          <a:prstGeom prst="rect">
+            <a:avLst/>
+          </a:prstGeom>
+          <a:noFill/>
+          <a:ln/>
+        </p:spPr>
+        <p:txBody>
+          <a:bodyPr wrap="square" lIns="0" tIns="0" rIns="0" bIns="0" rtlCol="0" anchor="ctr"/>
+          <a:lstStyle/>
+          <a:p>
+            <a:pPr algn="ctr" indent="0" marL="0">
+              <a:buNone/>
+            </a:pPr>
+            <a:r>
+              <a:rPr lang="en-US" sz="1800" b="1" dirty="0">
+                <a:solidFill>
+                  <a:srgbClr val="FFFFFF"/>
+                </a:solidFill>
+                <a:latin typeface="Cambria" pitchFamily="34" charset="0"/>
+                <a:ea typeface="Cambria" pitchFamily="34" charset="-122"/>
+                <a:cs typeface="Cambria" pitchFamily="34" charset="-120"/>
+              </a:rPr>
+              <a:t>4</a:t>
+            </a:r>
+            <a:endParaRPr lang="en-US" sz="1800" dirty="0"/>
+          </a:p>
+        </p:txBody>
+      </p:sp>
+      <p:sp>
+        <p:nvSpPr>
+          <p:cNvPr id="25" name="Text 23"/>
+          <p:cNvSpPr txBox="1"/>
+          <p:nvPr/>
+        </p:nvSpPr>
+        <p:spPr>
+          <a:xfrm>
+            <a:off x="9098280" y="3154680"/>
+            <a:ext cx="2286000" cy="320040"/>
+          </a:xfrm>
+          <a:prstGeom prst="rect">
+            <a:avLst/>
+          </a:prstGeom>
+          <a:noFill/>
+          <a:ln/>
+        </p:spPr>
+        <p:txBody>
+          <a:bodyPr wrap="square" lIns="0" tIns="0" rIns="0" bIns="0" rtlCol="0" anchor="ctr"/>
+          <a:lstStyle/>
+          <a:p>
+            <a:pPr algn="ctr" indent="0" marL="0">
+              <a:buNone/>
+            </a:pPr>
+            <a:r>
+              <a:rPr lang="en-US" sz="1200" b="1" dirty="0">
+                <a:solidFill>
+                  <a:srgbClr val="1C7293"/>
+                </a:solidFill>
+                <a:latin typeface="Calibri" pitchFamily="34" charset="0"/>
+                <a:ea typeface="Calibri" pitchFamily="34" charset="-122"/>
+                <a:cs typeface="Calibri" pitchFamily="34" charset="-120"/>
+              </a:rPr>
+              <a:t>第4四半期</a:t>
+            </a:r>
+            <a:endParaRPr lang="en-US" sz="1200" dirty="0"/>
+          </a:p>
+        </p:txBody>
+      </p:sp>
+      <p:sp>
+        <p:nvSpPr>
+          <p:cNvPr id="26" name="Shape 24"/>
+          <p:cNvSpPr/>
+          <p:nvPr/>
+        </p:nvSpPr>
+        <p:spPr>
+          <a:xfrm>
+            <a:off x="9098280" y="3520440"/>
+            <a:ext cx="2286000" cy="1737360"/>
+          </a:xfrm>
+          <a:prstGeom prst="roundRect">
+            <a:avLst>
+              <a:gd name="adj" fmla="val 4211"/>
+            </a:avLst>
+          </a:prstGeom>
+          <a:solidFill>
+            <a:srgbClr val="F4F8FA"/>
+          </a:solidFill>
+          <a:ln/>
+        </p:spPr>
+      </p:sp>
+      <p:sp>
+        <p:nvSpPr>
+          <p:cNvPr id="27" name="Text 25"/>
+          <p:cNvSpPr txBox="1"/>
+          <p:nvPr/>
+        </p:nvSpPr>
+        <p:spPr>
+          <a:xfrm>
+            <a:off x="9235440" y="3657600"/>
+            <a:ext cx="2011680" cy="411480"/>
+          </a:xfrm>
+          <a:prstGeom prst="rect">
+            <a:avLst/>
+          </a:prstGeom>
+          <a:noFill/>
+          <a:ln/>
+        </p:spPr>
+        <p:txBody>
+          <a:bodyPr wrap="square" lIns="0" tIns="0" rIns="0" bIns="0" rtlCol="0" anchor="ctr"/>
+          <a:lstStyle/>
+          <a:p>
+            <a:pPr algn="ctr" indent="0" marL="0">
+              <a:buNone/>
+            </a:pPr>
+            <a:r>
+              <a:rPr lang="en-US" sz="1450" b="1" dirty="0">
+                <a:solidFill>
+                  <a:srgbClr val="21295C"/>
+                </a:solidFill>
+                <a:latin typeface="Cambria" pitchFamily="34" charset="0"/>
+                <a:ea typeface="Cambria" pitchFamily="34" charset="-122"/>
+                <a:cs typeface="Cambria" pitchFamily="34" charset="-120"/>
+              </a:rPr>
+              <a:t>試行・確定</a:t>
+            </a:r>
+            <a:endParaRPr lang="en-US" sz="1450" dirty="0"/>
+          </a:p>
+        </p:txBody>
+      </p:sp>
+      <p:sp>
+        <p:nvSpPr>
+          <p:cNvPr id="28" name="Text 26"/>
+          <p:cNvSpPr txBox="1"/>
+          <p:nvPr/>
+        </p:nvSpPr>
+        <p:spPr>
+          <a:xfrm>
+            <a:off x="9235440" y="4114800"/>
+            <a:ext cx="2011680" cy="1051560"/>
+          </a:xfrm>
+          <a:prstGeom prst="rect">
+            <a:avLst/>
+          </a:prstGeom>
+          <a:noFill/>
+          <a:ln/>
+        </p:spPr>
+        <p:txBody>
+          <a:bodyPr wrap="square" lIns="0" tIns="0" rIns="0" bIns="0" rtlCol="0" anchor="t"/>
+          <a:lstStyle/>
+          <a:p>
+            <a:pPr algn="ctr" indent="0" marL="0">
+              <a:buNone/>
+            </a:pPr>
+            <a:r>
+              <a:rPr lang="en-US" sz="1100" dirty="0">
+                <a:solidFill>
+                  <a:srgbClr val="1E2430"/>
+                </a:solidFill>
+                <a:latin typeface="Calibri" pitchFamily="34" charset="0"/>
+                <a:ea typeface="Calibri" pitchFamily="34" charset="-122"/>
+                <a:cs typeface="Calibri" pitchFamily="34" charset="-120"/>
+              </a:rPr>
+              <a:t>訓練等での試行運用を経て</a:t>
+            </a:r>
+            <a:endParaRPr lang="en-US" sz="1100" dirty="0"/>
+          </a:p>
+          <a:p>
+            <a:pPr algn="ctr" indent="0" marL="0">
+              <a:buNone/>
+            </a:pPr>
+            <a:r>
+              <a:rPr lang="en-US" sz="1100" dirty="0">
+                <a:solidFill>
+                  <a:srgbClr val="1E2430"/>
+                </a:solidFill>
+                <a:latin typeface="Calibri" pitchFamily="34" charset="0"/>
+                <a:ea typeface="Calibri" pitchFamily="34" charset="-122"/>
+                <a:cs typeface="Calibri" pitchFamily="34" charset="-120"/>
+              </a:rPr>
+              <a:t>マニュアルを確定・全庁展開</a:t>
+            </a:r>
+            <a:endParaRPr lang="en-US" sz="1100" dirty="0"/>
+          </a:p>
+        </p:txBody>
+      </p:sp>
+      <p:sp>
+        <p:nvSpPr>
+          <p:cNvPr id="29" name="Text 27"/>
           <p:cNvSpPr txBox="1"/>
           <p:nvPr/>
         </p:nvSpPr>
@@ -8437,7 +9201,7 @@
       </p:sp>
       <p:sp>
         <p:nvSpPr>
-          <p:cNvPr id="11" name="Text 9"/>
+          <p:cNvPr id="30" name="Text 28"/>
           <p:cNvSpPr txBox="1"/>
           <p:nvPr/>
         </p:nvSpPr>
